--- a/revisions/QuantumEntangledMultiplexingTransceiver_Rev5.pptx
+++ b/revisions/QuantumEntangledMultiplexingTransceiver_Rev5.pptx
@@ -16,28 +16,29 @@
     <p:sldId id="261" r:id="rId10"/>
     <p:sldId id="290" r:id="rId11"/>
     <p:sldId id="262" r:id="rId12"/>
-    <p:sldId id="265" r:id="rId13"/>
-    <p:sldId id="289" r:id="rId14"/>
-    <p:sldId id="266" r:id="rId15"/>
-    <p:sldId id="267" r:id="rId16"/>
-    <p:sldId id="268" r:id="rId17"/>
-    <p:sldId id="270" r:id="rId18"/>
-    <p:sldId id="271" r:id="rId19"/>
-    <p:sldId id="272" r:id="rId20"/>
-    <p:sldId id="273" r:id="rId21"/>
-    <p:sldId id="274" r:id="rId22"/>
-    <p:sldId id="275" r:id="rId23"/>
-    <p:sldId id="276" r:id="rId24"/>
-    <p:sldId id="277" r:id="rId25"/>
-    <p:sldId id="278" r:id="rId26"/>
-    <p:sldId id="279" r:id="rId27"/>
-    <p:sldId id="280" r:id="rId28"/>
-    <p:sldId id="281" r:id="rId29"/>
-    <p:sldId id="282" r:id="rId30"/>
-    <p:sldId id="283" r:id="rId31"/>
-    <p:sldId id="284" r:id="rId32"/>
-    <p:sldId id="285" r:id="rId33"/>
-    <p:sldId id="287" r:id="rId34"/>
+    <p:sldId id="288" r:id="rId13"/>
+    <p:sldId id="265" r:id="rId14"/>
+    <p:sldId id="289" r:id="rId15"/>
+    <p:sldId id="266" r:id="rId16"/>
+    <p:sldId id="267" r:id="rId17"/>
+    <p:sldId id="268" r:id="rId18"/>
+    <p:sldId id="270" r:id="rId19"/>
+    <p:sldId id="271" r:id="rId20"/>
+    <p:sldId id="272" r:id="rId21"/>
+    <p:sldId id="273" r:id="rId22"/>
+    <p:sldId id="274" r:id="rId23"/>
+    <p:sldId id="275" r:id="rId24"/>
+    <p:sldId id="276" r:id="rId25"/>
+    <p:sldId id="277" r:id="rId26"/>
+    <p:sldId id="278" r:id="rId27"/>
+    <p:sldId id="279" r:id="rId28"/>
+    <p:sldId id="280" r:id="rId29"/>
+    <p:sldId id="281" r:id="rId30"/>
+    <p:sldId id="282" r:id="rId31"/>
+    <p:sldId id="283" r:id="rId32"/>
+    <p:sldId id="284" r:id="rId33"/>
+    <p:sldId id="285" r:id="rId34"/>
+    <p:sldId id="287" r:id="rId35"/>
   </p:sldIdLst>
   <p:sldSz cx="6858000" cy="9906000" type="A4"/>
   <p:notesSz cx="6858000" cy="9144000"/>
@@ -3176,7 +3177,7 @@
             <a:pPr algn="ctr"/>
             <a:r>
               <a:rPr lang="en-GB" dirty="0"/>
-              <a:t>Rev.5</a:t>
+              <a:t>Rev.1</a:t>
             </a:r>
           </a:p>
         </p:txBody>
@@ -3220,7 +3221,7 @@
         <p:spPr>
           <a:xfrm>
             <a:off x="0" y="0"/>
-            <a:ext cx="6858000" cy="461665"/>
+            <a:ext cx="6858000" cy="523719"/>
           </a:xfrm>
           <a:prstGeom prst="rect">
             <a:avLst/>
@@ -3236,7 +3237,7 @@
             <a:pPr algn="ctr"/>
             <a:r>
               <a:rPr lang="en-GB" sz="2400" dirty="0"/>
-              <a:t>Fluorescence Photon Direction - A Pointer?</a:t>
+              <a:t>Fluorescence Photon Direction — A Pointer?</a:t>
             </a:r>
           </a:p>
         </p:txBody>
@@ -3281,14 +3282,14 @@
             </a:pPr>
             <a:r>
               <a:rPr lang="en-GB" sz="1600" b="1" dirty="0"/>
-              <a:t>Emission direction - governed by the transition, not the spin</a:t>
+              <a:t>Emission direction — governed by the transition, not the spin</a:t>
             </a:r>
           </a:p>
           <a:p>
             <a:pPr lvl="1" algn="l"/>
             <a:r>
               <a:rPr lang="en-GB" sz="1400" dirty="0"/>
-              <a:t>The 397 nm transition in Ca⁺ is an electric dipole transition. The photon emission pattern is a torus - strongest perpendicular to the dipole axis, zero along it. This dipole axis is fixed by the laser polarisation and the quantisation axis (the applied B-field direction). The spin orientation of the individual ion does not change which direction the photon travels.</a:t>
+              <a:t>The 397 nm transition in Ca⁺ is an electric dipole transition. The photon emission pattern is a torus — strongest perpendicular to the dipole axis, zero along it. This dipole axis is fixed by the laser polarisation and the quantisation axis (the applied B-field direction). The spin orientation of the individual ion does not change which direction the photon travels.</a:t>
             </a:r>
           </a:p>
           <a:p>
@@ -3310,7 +3311,7 @@
             <a:pPr lvl="1" algn="l"/>
             <a:r>
               <a:rPr lang="en-GB" sz="1400" dirty="0"/>
-              <a:t>The spin state determines which transition is driven and therefore the intensity and polarisation of the emitted photon - not its direction.</a:t>
+              <a:t>The spin state determines which transition is driven and therefore the intensity and polarisation of the emitted photon — not its direction.</a:t>
             </a:r>
           </a:p>
           <a:p>
@@ -3324,7 +3325,7 @@
             <a:pPr lvl="1" algn="l"/>
             <a:r>
               <a:rPr lang="en-GB" sz="1400" dirty="0"/>
-              <a:t>The continuous orientation angle modulates the probability amplitude of emitting into a given polarisation state - measurable as intensity variation as the probe polarisation is rotated.</a:t>
+              <a:t>The continuous orientation angle modulates the probability amplitude of emitting into a given polarisation state — measurable as intensity variation as the probe polarisation is rotated.</a:t>
             </a:r>
           </a:p>
           <a:p>
@@ -3339,7 +3340,7 @@
             </a:pPr>
             <a:r>
               <a:rPr lang="en-GB" sz="1600" b="1" dirty="0"/>
-              <a:t>Reconstructing the angle - polarimetry not directionality</a:t>
+              <a:t>Reconstructing the angle — polarimetry not directionality</a:t>
             </a:r>
           </a:p>
           <a:p>
@@ -3367,7 +3368,7 @@
             <a:pPr lvl="1" algn="l"/>
             <a:r>
               <a:rPr lang="en-GB" sz="1400" dirty="0"/>
-              <a:t>This is weak quantum state tomography applied per row - the angle is recovered from intensity variation, not photon direction.</a:t>
+              <a:t>This is weak quantum state tomography applied per row — the angle is recovered from intensity variation, not photon direction.</a:t>
             </a:r>
           </a:p>
           <a:p>
@@ -3382,7 +3383,7 @@
             </a:pPr>
             <a:r>
               <a:rPr lang="en-GB" sz="1600" b="1" dirty="0"/>
-              <a:t>The chiral waveguide exception - where direction IS a pointer</a:t>
+              <a:t>The chiral waveguide exception — where direction IS a pointer</a:t>
             </a:r>
           </a:p>
           <a:p>
@@ -3396,7 +3397,7 @@
             <a:pPr lvl="1" algn="l"/>
             <a:r>
               <a:rPr lang="en-GB" sz="1400" dirty="0"/>
-              <a:t>This is experimentally demonstrated. It would make the EMT read mechanism significantly more elegant - a directional detector rather than an intensity detector. It requires the ions to be coupled to a nanophotonic structure rather than sitting in free space, which is an active research direction and a meaningful potential upgrade to the EMT read architecture.</a:t>
+              <a:t>This is experimentally demonstrated. It would make the EMT read mechanism significantly more elegant — a directional detector rather than an intensity detector. It requires the ions to be coupled to a nanophotonic structure rather than sitting in free space, which is an active research direction and a meaningful potential upgrade to the EMT read architecture.</a:t>
             </a:r>
           </a:p>
         </p:txBody>
@@ -3465,7 +3466,7 @@
         <p:spPr>
           <a:xfrm>
             <a:off x="150113" y="671863"/>
-            <a:ext cx="6563531" cy="3785652"/>
+            <a:ext cx="6563531" cy="4970591"/>
           </a:xfrm>
           <a:prstGeom prst="rect">
             <a:avLst/>
@@ -3480,13 +3481,13 @@
           <a:p>
             <a:pPr algn="l"/>
             <a:r>
-              <a:rPr lang="en-GB" sz="1400" dirty="0"/>
+              <a:rPr lang="en-GB" sz="1600" dirty="0"/>
               <a:t>Setting ion orientation requires a controlled rotation of the spin state. Three methods exist; Method 3 (miniature coil, magnetic pulse) is recommended for the EMT as it requires no optical alignment and is directly MCU-compatible.</a:t>
             </a:r>
           </a:p>
           <a:p>
             <a:pPr algn="l"/>
-            <a:endParaRPr lang="en-GB" sz="1400" dirty="0"/>
+            <a:endParaRPr lang="en-GB" sz="1600" dirty="0"/>
           </a:p>
           <a:p>
             <a:pPr algn="l">
@@ -3495,20 +3496,20 @@
               </a:spcBef>
             </a:pPr>
             <a:r>
-              <a:rPr lang="en-GB" sz="1600" b="1" dirty="0"/>
+              <a:rPr lang="en-GB" sz="1700" b="1" dirty="0"/>
               <a:t>Method 1 - ESR / Microwave Pulse:</a:t>
             </a:r>
           </a:p>
           <a:p>
             <a:pPr lvl="1" algn="l"/>
             <a:r>
-              <a:rPr lang="en-GB" sz="1400" dirty="0"/>
+              <a:rPr lang="en-GB" sz="1600" dirty="0"/>
               <a:t>Microwave pulse at Larmor frequency. Pulse duration sets rotation angle. Rabi oscillation achieves any target angle. Precision &lt; 0.1 degrees.</a:t>
             </a:r>
           </a:p>
           <a:p>
             <a:pPr algn="l"/>
-            <a:endParaRPr lang="en-GB" sz="1400" dirty="0"/>
+            <a:endParaRPr lang="en-GB" sz="1600" dirty="0"/>
           </a:p>
           <a:p>
             <a:pPr algn="l">
@@ -3517,20 +3518,20 @@
               </a:spcBef>
             </a:pPr>
             <a:r>
-              <a:rPr lang="en-GB" sz="1600" b="1" dirty="0"/>
+              <a:rPr lang="en-GB" sz="1700" b="1" dirty="0"/>
               <a:t>Method 2 - Optical Pumping:</a:t>
             </a:r>
           </a:p>
           <a:p>
             <a:pPr lvl="1" algn="l"/>
             <a:r>
-              <a:rPr lang="en-GB" sz="1400" dirty="0"/>
+              <a:rPr lang="en-GB" sz="1600" dirty="0"/>
               <a:t>Resonant laser pulse drives spin to target state. Nanosecond timescale. Precision approximately 1 degree per pulse.</a:t>
             </a:r>
           </a:p>
           <a:p>
             <a:pPr algn="l"/>
-            <a:endParaRPr lang="en-GB" sz="1400" dirty="0"/>
+            <a:endParaRPr lang="en-GB" sz="1600" dirty="0"/>
           </a:p>
           <a:p>
             <a:pPr algn="l">
@@ -3539,25 +3540,55 @@
               </a:spcBef>
             </a:pPr>
             <a:r>
-              <a:rPr lang="en-GB" sz="1600" b="1" dirty="0"/>
+              <a:rPr lang="en-GB" sz="1700" b="1" dirty="0"/>
               <a:t>Method 3 - Miniature Coil (recommended):</a:t>
             </a:r>
           </a:p>
           <a:p>
             <a:pPr lvl="1" algn="l"/>
             <a:r>
-              <a:rPr lang="en-GB" sz="1400" dirty="0"/>
+              <a:rPr lang="en-GB" sz="1600" dirty="0"/>
               <a:t>Nanoscale coil per cavity, MCU GPIO-driven. No optical alignment. Row and column matrix addressing. Fabricated in same lithography step as grid. Sub-degree angular control. Nanosecond pulse duration.</a:t>
             </a:r>
           </a:p>
         </p:txBody>
       </p:sp>
+    </p:spTree>
+    <p:extLst>
+      <p:ext uri="{BB962C8B-B14F-4D97-AF65-F5344CB8AC3E}">
+        <p14:creationId xmlns:p14="http://schemas.microsoft.com/office/powerpoint/2010/main" val="2459111394"/>
+      </p:ext>
+    </p:extLst>
+  </p:cSld>
+  <p:clrMapOvr>
+    <a:masterClrMapping/>
+  </p:clrMapOvr>
+</p:sld>
+</file>
+
+<file path=ppt/slides/slide12.xml><?xml version="1.0" encoding="utf-8"?>
+<p:sld xmlns:a="http://schemas.openxmlformats.org/drawingml/2006/main" xmlns:r="http://schemas.openxmlformats.org/officeDocument/2006/relationships" xmlns:p="http://schemas.openxmlformats.org/presentationml/2006/main">
+  <p:cSld>
+    <p:spTree>
+      <p:nvGrpSpPr>
+        <p:cNvPr id="1" name=""/>
+        <p:cNvGrpSpPr/>
+        <p:nvPr/>
+      </p:nvGrpSpPr>
+      <p:grpSpPr>
+        <a:xfrm>
+          <a:off x="0" y="0"/>
+          <a:ext cx="0" cy="0"/>
+          <a:chOff x="0" y="0"/>
+          <a:chExt cx="0" cy="0"/>
+        </a:xfrm>
+      </p:grpSpPr>
       <p:pic>
         <p:nvPicPr>
-          <p:cNvPr id="2" name="Picture 1" descr="image9.png">
+          <p:cNvPr id="4" name="Picture 3" descr="image9.png">
             <a:extLst>
               <a:ext uri="{FF2B5EF4-FFF2-40B4-BE49-F238E27FC236}">
-                <a16:creationId xmlns:a16="http://schemas.microsoft.com/office/drawing/2014/main" id="{A525FA7A-A9E2-E475-9879-41ED65B41EDD}"/>
+                <a16:creationId xmlns:a16="http://schemas.microsoft.com/office/drawing/2014/main" id="{A47C5D56-EAF6-874D-6270-6811AB0B6723}"/>
               </a:ext>
             </a:extLst>
           </p:cNvPr>
@@ -3574,8 +3605,8 @@
         </p:blipFill>
         <p:spPr>
           <a:xfrm>
-            <a:off x="360963" y="4457515"/>
-            <a:ext cx="6136074" cy="5145778"/>
+            <a:off x="0" y="2077403"/>
+            <a:ext cx="6858000" cy="5751193"/>
           </a:xfrm>
           <a:prstGeom prst="rect">
             <a:avLst/>
@@ -3585,7 +3616,7 @@
     </p:spTree>
     <p:extLst>
       <p:ext uri="{BB962C8B-B14F-4D97-AF65-F5344CB8AC3E}">
-        <p14:creationId xmlns:p14="http://schemas.microsoft.com/office/powerpoint/2010/main" val="2459111394"/>
+        <p14:creationId xmlns:p14="http://schemas.microsoft.com/office/powerpoint/2010/main" val="3951664694"/>
       </p:ext>
     </p:extLst>
   </p:cSld>
@@ -3595,7 +3626,7 @@
 </p:sld>
 </file>
 
-<file path=ppt/slides/slide12.xml><?xml version="1.0" encoding="utf-8"?>
+<file path=ppt/slides/slide13.xml><?xml version="1.0" encoding="utf-8"?>
 <p:sld xmlns:a="http://schemas.openxmlformats.org/drawingml/2006/main" xmlns:r="http://schemas.openxmlformats.org/officeDocument/2006/relationships" xmlns:p="http://schemas.openxmlformats.org/presentationml/2006/main">
   <p:cSld>
     <p:spTree>
@@ -3657,7 +3688,7 @@
         <p:spPr>
           <a:xfrm>
             <a:off x="150113" y="671863"/>
-            <a:ext cx="6563531" cy="9005537"/>
+            <a:ext cx="6563531" cy="1645920"/>
           </a:xfrm>
           <a:prstGeom prst="rect">
             <a:avLst/>
@@ -3755,7 +3786,7 @@
 </p:sld>
 </file>
 
-<file path=ppt/slides/slide13.xml><?xml version="1.0" encoding="utf-8"?>
+<file path=ppt/slides/slide14.xml><?xml version="1.0" encoding="utf-8"?>
 <p:sld xmlns:a="http://schemas.openxmlformats.org/drawingml/2006/main" xmlns:r="http://schemas.openxmlformats.org/officeDocument/2006/relationships" xmlns:p="http://schemas.openxmlformats.org/presentationml/2006/main">
   <p:cSld>
     <p:spTree>
@@ -3774,13 +3805,7 @@
       </p:grpSpPr>
       <p:pic>
         <p:nvPicPr>
-          <p:cNvPr id="4" name="Picture 3" descr="image10.png">
-            <a:extLst>
-              <a:ext uri="{FF2B5EF4-FFF2-40B4-BE49-F238E27FC236}">
-                <a16:creationId xmlns:a16="http://schemas.microsoft.com/office/drawing/2014/main" id="{93A49929-8D86-4251-2CBB-8556CF065B77}"/>
-              </a:ext>
-            </a:extLst>
-          </p:cNvPr>
+          <p:cNvPr id="2" name="Picture 1" descr="image.png"/>
           <p:cNvPicPr>
             <a:picLocks noChangeAspect="1"/>
           </p:cNvPicPr>
@@ -3794,8 +3819,8 @@
         </p:blipFill>
         <p:spPr>
           <a:xfrm>
-            <a:off x="0" y="814137"/>
-            <a:ext cx="6858000" cy="8277726"/>
+            <a:off x="36576" y="457200"/>
+            <a:ext cx="6784848" cy="5760720"/>
           </a:xfrm>
           <a:prstGeom prst="rect">
             <a:avLst/>
@@ -3815,7 +3840,7 @@
 </p:sld>
 </file>
 
-<file path=ppt/slides/slide14.xml><?xml version="1.0" encoding="utf-8"?>
+<file path=ppt/slides/slide15.xml><?xml version="1.0" encoding="utf-8"?>
 <p:sld xmlns:a="http://schemas.openxmlformats.org/drawingml/2006/main" xmlns:r="http://schemas.openxmlformats.org/officeDocument/2006/relationships" xmlns:p="http://schemas.openxmlformats.org/presentationml/2006/main">
   <p:cSld>
     <p:spTree>
@@ -3922,7 +3947,7 @@
 </p:sld>
 </file>
 
-<file path=ppt/slides/slide15.xml><?xml version="1.0" encoding="utf-8"?>
+<file path=ppt/slides/slide16.xml><?xml version="1.0" encoding="utf-8"?>
 <p:sld xmlns:a="http://schemas.openxmlformats.org/drawingml/2006/main" xmlns:r="http://schemas.openxmlformats.org/officeDocument/2006/relationships" xmlns:p="http://schemas.openxmlformats.org/presentationml/2006/main">
   <p:cSld>
     <p:spTree>
@@ -3981,6 +4006,41 @@
           </a:p>
         </p:txBody>
       </p:sp>
+      <p:sp>
+        <p:nvSpPr>
+          <p:cNvPr id="5" name="TextBox 4">
+            <a:extLst>
+              <a:ext uri="{FF2B5EF4-FFF2-40B4-BE49-F238E27FC236}">
+                <a16:creationId xmlns:a16="http://schemas.microsoft.com/office/drawing/2014/main" id="{0F72225E-736E-48B8-A76B-FEB592A888ED}"/>
+              </a:ext>
+            </a:extLst>
+          </p:cNvPr>
+          <p:cNvSpPr txBox="1"/>
+          <p:nvPr/>
+        </p:nvSpPr>
+        <p:spPr>
+          <a:xfrm>
+            <a:off x="0" y="657225"/>
+            <a:ext cx="6858000" cy="369332"/>
+          </a:xfrm>
+          <a:prstGeom prst="rect">
+            <a:avLst/>
+          </a:prstGeom>
+          <a:noFill/>
+        </p:spPr>
+        <p:txBody>
+          <a:bodyPr wrap="square" rtlCol="0">
+            <a:spAutoFit/>
+          </a:bodyPr>
+          <a:lstStyle/>
+          <a:p>
+            <a:r>
+              <a:rPr lang="en-GB" dirty="0"/>
+              <a:t>Title</a:t>
+            </a:r>
+          </a:p>
+        </p:txBody>
+      </p:sp>
       <p:pic>
         <p:nvPicPr>
           <p:cNvPr id="3" name="Picture 2">
@@ -4048,7 +4108,7 @@
 </p:sld>
 </file>
 
-<file path=ppt/slides/slide16.xml><?xml version="1.0" encoding="utf-8"?>
+<file path=ppt/slides/slide17.xml><?xml version="1.0" encoding="utf-8"?>
 <p:sld xmlns:a="http://schemas.openxmlformats.org/drawingml/2006/main" xmlns:r="http://schemas.openxmlformats.org/officeDocument/2006/relationships" xmlns:p="http://schemas.openxmlformats.org/presentationml/2006/main">
   <p:cSld>
     <p:spTree>
@@ -4212,7 +4272,7 @@
 </p:sld>
 </file>
 
-<file path=ppt/slides/slide17.xml><?xml version="1.0" encoding="utf-8"?>
+<file path=ppt/slides/slide18.xml><?xml version="1.0" encoding="utf-8"?>
 <p:sld xmlns:a="http://schemas.openxmlformats.org/drawingml/2006/main" xmlns:r="http://schemas.openxmlformats.org/officeDocument/2006/relationships" xmlns:p="http://schemas.openxmlformats.org/presentationml/2006/main">
   <p:cSld>
     <p:spTree>
@@ -4385,7 +4445,7 @@
 </p:sld>
 </file>
 
-<file path=ppt/slides/slide18.xml><?xml version="1.0" encoding="utf-8"?>
+<file path=ppt/slides/slide19.xml><?xml version="1.0" encoding="utf-8"?>
 <p:sld xmlns:a="http://schemas.openxmlformats.org/drawingml/2006/main" xmlns:r="http://schemas.openxmlformats.org/officeDocument/2006/relationships" xmlns:p="http://schemas.openxmlformats.org/presentationml/2006/main">
   <p:cSld>
     <p:spTree>
@@ -4505,149 +4565,6 @@
     <p:extLst>
       <p:ext uri="{BB962C8B-B14F-4D97-AF65-F5344CB8AC3E}">
         <p14:creationId xmlns:p14="http://schemas.microsoft.com/office/powerpoint/2010/main" val="2334728519"/>
-      </p:ext>
-    </p:extLst>
-  </p:cSld>
-  <p:clrMapOvr>
-    <a:masterClrMapping/>
-  </p:clrMapOvr>
-</p:sld>
-</file>
-
-<file path=ppt/slides/slide19.xml><?xml version="1.0" encoding="utf-8"?>
-<p:sld xmlns:a="http://schemas.openxmlformats.org/drawingml/2006/main" xmlns:r="http://schemas.openxmlformats.org/officeDocument/2006/relationships" xmlns:p="http://schemas.openxmlformats.org/presentationml/2006/main">
-  <p:cSld>
-    <p:spTree>
-      <p:nvGrpSpPr>
-        <p:cNvPr id="1" name="">
-          <a:extLst>
-            <a:ext uri="{FF2B5EF4-FFF2-40B4-BE49-F238E27FC236}">
-              <a16:creationId xmlns:a16="http://schemas.microsoft.com/office/drawing/2014/main" id="{6900EE28-7072-135D-ABDD-188B220B7961}"/>
-            </a:ext>
-          </a:extLst>
-        </p:cNvPr>
-        <p:cNvGrpSpPr/>
-        <p:nvPr/>
-      </p:nvGrpSpPr>
-      <p:grpSpPr>
-        <a:xfrm>
-          <a:off x="0" y="0"/>
-          <a:ext cx="0" cy="0"/>
-          <a:chOff x="0" y="0"/>
-          <a:chExt cx="0" cy="0"/>
-        </a:xfrm>
-      </p:grpSpPr>
-      <p:sp>
-        <p:nvSpPr>
-          <p:cNvPr id="4" name="TextBox 3">
-            <a:extLst>
-              <a:ext uri="{FF2B5EF4-FFF2-40B4-BE49-F238E27FC236}">
-                <a16:creationId xmlns:a16="http://schemas.microsoft.com/office/drawing/2014/main" id="{77BFE8A6-40E1-8F8A-0D89-55D3CA9F655D}"/>
-              </a:ext>
-            </a:extLst>
-          </p:cNvPr>
-          <p:cNvSpPr txBox="1"/>
-          <p:nvPr/>
-        </p:nvSpPr>
-        <p:spPr>
-          <a:xfrm>
-            <a:off x="0" y="0"/>
-            <a:ext cx="6858000" cy="523220"/>
-          </a:xfrm>
-          <a:prstGeom prst="rect">
-            <a:avLst/>
-          </a:prstGeom>
-          <a:noFill/>
-        </p:spPr>
-        <p:txBody>
-          <a:bodyPr wrap="square" rtlCol="0">
-            <a:spAutoFit/>
-          </a:bodyPr>
-          <a:lstStyle/>
-          <a:p>
-            <a:pPr algn="ctr"/>
-            <a:r>
-              <a:rPr lang="en-GB" sz="2800" dirty="0"/>
-              <a:t>Expanding the reach</a:t>
-            </a:r>
-          </a:p>
-        </p:txBody>
-      </p:sp>
-      <p:sp>
-        <p:nvSpPr>
-          <p:cNvPr id="5" name="TextBox 4">
-            <a:extLst>
-              <a:ext uri="{FF2B5EF4-FFF2-40B4-BE49-F238E27FC236}">
-                <a16:creationId xmlns:a16="http://schemas.microsoft.com/office/drawing/2014/main" id="{3376B9C9-C82C-E0F3-1A83-770A1FAB745C}"/>
-              </a:ext>
-            </a:extLst>
-          </p:cNvPr>
-          <p:cNvSpPr txBox="1"/>
-          <p:nvPr/>
-        </p:nvSpPr>
-        <p:spPr>
-          <a:xfrm>
-            <a:off x="0" y="657225"/>
-            <a:ext cx="6858000" cy="3970318"/>
-          </a:xfrm>
-          <a:prstGeom prst="rect">
-            <a:avLst/>
-          </a:prstGeom>
-          <a:noFill/>
-        </p:spPr>
-        <p:txBody>
-          <a:bodyPr wrap="square" rtlCol="0">
-            <a:spAutoFit/>
-          </a:bodyPr>
-          <a:lstStyle/>
-          <a:p>
-            <a:r>
-              <a:rPr lang="en-GB" dirty="0"/>
-              <a:t>While a pair of these enable communication across the solar system, it is restricted to the 2 devices:</a:t>
-            </a:r>
-          </a:p>
-          <a:p>
-            <a:r>
-              <a:rPr lang="en-GB" dirty="0"/>
-              <a:t>Mars &lt;-&gt; Earth</a:t>
-            </a:r>
-          </a:p>
-          <a:p>
-            <a:r>
-              <a:rPr lang="en-GB" dirty="0"/>
-              <a:t>Or Earth &lt;-&gt; Spaceship</a:t>
-            </a:r>
-          </a:p>
-          <a:p>
-            <a:endParaRPr lang="en-GB" dirty="0"/>
-          </a:p>
-          <a:p>
-            <a:r>
-              <a:rPr lang="en-GB" dirty="0"/>
-              <a:t>To overcome this limitation, imagine a “call centre” that houses all Earth bound transceivers (or a dedicated space station) - by housing and connecting them together, communication channels can be extended, for example:</a:t>
-            </a:r>
-          </a:p>
-          <a:p>
-            <a:r>
-              <a:rPr lang="en-GB" dirty="0"/>
-              <a:t>Mars wants to call a Ship orbiting Jupiter but the Ship only has 1 EMT that is entangled with a EMT on the “Call Centre Station”..</a:t>
-            </a:r>
-          </a:p>
-          <a:p>
-            <a:r>
-              <a:rPr lang="en-GB" dirty="0"/>
-              <a:t>Mars would call the Station and the Station would route the call using classical means in-between the multiple EMTs.</a:t>
-            </a:r>
-          </a:p>
-          <a:p>
-            <a:endParaRPr lang="en-GB" dirty="0"/>
-          </a:p>
-        </p:txBody>
-      </p:sp>
-    </p:spTree>
-    <p:extLst>
-      <p:ext uri="{BB962C8B-B14F-4D97-AF65-F5344CB8AC3E}">
-        <p14:creationId xmlns:p14="http://schemas.microsoft.com/office/powerpoint/2010/main" val="2335475715"/>
       </p:ext>
     </p:extLst>
   </p:cSld>
@@ -4796,7 +4713,13 @@
   <p:cSld>
     <p:spTree>
       <p:nvGrpSpPr>
-        <p:cNvPr id="1" name=""/>
+        <p:cNvPr id="1" name="">
+          <a:extLst>
+            <a:ext uri="{FF2B5EF4-FFF2-40B4-BE49-F238E27FC236}">
+              <a16:creationId xmlns:a16="http://schemas.microsoft.com/office/drawing/2014/main" id="{6900EE28-7072-135D-ABDD-188B220B7961}"/>
+            </a:ext>
+          </a:extLst>
+        </p:cNvPr>
         <p:cNvGrpSpPr/>
         <p:nvPr/>
       </p:nvGrpSpPr>
@@ -4810,14 +4733,20 @@
       </p:grpSpPr>
       <p:sp>
         <p:nvSpPr>
-          <p:cNvPr id="2" name="TextBox 1"/>
+          <p:cNvPr id="4" name="TextBox 3">
+            <a:extLst>
+              <a:ext uri="{FF2B5EF4-FFF2-40B4-BE49-F238E27FC236}">
+                <a16:creationId xmlns:a16="http://schemas.microsoft.com/office/drawing/2014/main" id="{77BFE8A6-40E1-8F8A-0D89-55D3CA9F655D}"/>
+              </a:ext>
+            </a:extLst>
+          </p:cNvPr>
           <p:cNvSpPr txBox="1"/>
           <p:nvPr/>
         </p:nvSpPr>
         <p:spPr>
           <a:xfrm>
             <a:off x="0" y="0"/>
-            <a:ext cx="6858000" cy="800000"/>
+            <a:ext cx="6858000" cy="523220"/>
           </a:xfrm>
           <a:prstGeom prst="rect">
             <a:avLst/>
@@ -4825,7 +4754,7 @@
           <a:noFill/>
         </p:spPr>
         <p:txBody>
-          <a:bodyPr wrap="square">
+          <a:bodyPr wrap="square" rtlCol="0">
             <a:spAutoFit/>
           </a:bodyPr>
           <a:lstStyle/>
@@ -4833,21 +4762,27 @@
             <a:pPr algn="ctr"/>
             <a:r>
               <a:rPr lang="en-GB" sz="2800" dirty="0"/>
-              <a:t>Calcium Ions as Particle Substrate</a:t>
-            </a:r>
-          </a:p>
-        </p:txBody>
-      </p:sp>
-      <p:sp>
-        <p:nvSpPr>
-          <p:cNvPr id="3" name="TextBox 2"/>
+              <a:t>Expanding the reach</a:t>
+            </a:r>
+          </a:p>
+        </p:txBody>
+      </p:sp>
+      <p:sp>
+        <p:nvSpPr>
+          <p:cNvPr id="5" name="TextBox 4">
+            <a:extLst>
+              <a:ext uri="{FF2B5EF4-FFF2-40B4-BE49-F238E27FC236}">
+                <a16:creationId xmlns:a16="http://schemas.microsoft.com/office/drawing/2014/main" id="{3376B9C9-C82C-E0F3-1A83-770A1FAB745C}"/>
+              </a:ext>
+            </a:extLst>
+          </p:cNvPr>
           <p:cNvSpPr txBox="1"/>
           <p:nvPr/>
         </p:nvSpPr>
         <p:spPr>
           <a:xfrm>
-            <a:off x="150113" y="1000000"/>
-            <a:ext cx="6563531" cy="7366119"/>
+            <a:off x="0" y="657225"/>
+            <a:ext cx="6858000" cy="5078313"/>
           </a:xfrm>
           <a:prstGeom prst="rect">
             <a:avLst/>
@@ -4855,92 +4790,82 @@
           <a:noFill/>
         </p:spPr>
         <p:txBody>
-          <a:bodyPr wrap="square">
+          <a:bodyPr wrap="square" rtlCol="0">
             <a:spAutoFit/>
           </a:bodyPr>
           <a:lstStyle/>
           <a:p>
-            <a:pPr algn="l"/>
-            <a:r>
-              <a:rPr lang="en-GB" sz="1600" dirty="0"/>
-              <a:t>Calcium ions (Ca⁺) are the preferred substrate for the EMT. Unlike photons or NV centres, Ca⁺ ions are stationary qubits - they sit in an ion trap and hold their spin state indefinitely (with dynamical decoupling), rather than flying through a waveguide and needing to be caught in flight.</a:t>
-            </a:r>
-          </a:p>
-          <a:p>
-            <a:pPr algn="l"/>
-            <a:endParaRPr lang="en-GB" sz="1600" dirty="0"/>
-          </a:p>
-          <a:p>
-            <a:pPr algn="l">
-              <a:spcBef>
-                <a:spcPts val="400"/>
-              </a:spcBef>
-            </a:pPr>
-            <a:r>
-              <a:rPr lang="en-GB" sz="1700" b="1" dirty="0"/>
-              <a:t>Key advantages over other substrates:</a:t>
-            </a:r>
-          </a:p>
-          <a:p>
-            <a:pPr lvl="1" algn="l"/>
-            <a:r>
-              <a:rPr lang="en-GB" sz="1600" dirty="0"/>
-              <a:t>Coherence: seconds to minutes (electron spin); up to 10 hours (nuclear spin, Ca-43 with dynamical decoupling).</a:t>
-            </a:r>
-          </a:p>
-          <a:p>
-            <a:pPr lvl="1" algn="l"/>
-            <a:r>
-              <a:rPr lang="en-GB" sz="1600" dirty="0"/>
-              <a:t>Write precision: microwave pulse at Larmor frequency sets orientation to any angle with &lt; 0.1 degree precision in nanoseconds.</a:t>
-            </a:r>
-          </a:p>
-          <a:p>
-            <a:pPr lvl="1" algn="l"/>
-            <a:r>
-              <a:rPr lang="en-GB" sz="1600" dirty="0"/>
-              <a:t>Read fidelity: state-selective fluorescence at 397 nm. Readout fidelity &gt; 99.9% per shot - significantly better than NV-centre alternatives (~95%).</a:t>
-            </a:r>
-          </a:p>
-          <a:p>
-            <a:pPr lvl="1" algn="l"/>
-            <a:r>
-              <a:rPr lang="en-GB" sz="1600" dirty="0"/>
-              <a:t>Trap compatibility: Ca⁺ is confined by oscillating electric fields in a Paul trap. The magnetic manipulation field operates at a completely different frequency and does not disturb the trap - this is standard in all ion trap experiments.</a:t>
-            </a:r>
-          </a:p>
-          <a:p>
-            <a:pPr lvl="1" algn="l"/>
-            <a:r>
-              <a:rPr lang="en-GB" sz="1600" dirty="0"/>
-              <a:t>Entanglement: Molmer-Sorensen gate entangles ions in the same trap via their shared Coulomb motional mode. For remote re-entanglement, the Delft photon-mediated method is used - each ion emits an entanglement photon, the photons meet at a Bell measurement, and the classical result coordinates the ion correction.</a:t>
-            </a:r>
-          </a:p>
-          <a:p>
-            <a:pPr algn="l"/>
-            <a:endParaRPr lang="en-GB" sz="1600" dirty="0"/>
-          </a:p>
-          <a:p>
-            <a:pPr algn="l">
-              <a:spcBef>
-                <a:spcPts val="400"/>
-              </a:spcBef>
-            </a:pPr>
-            <a:r>
-              <a:rPr lang="en-GB" sz="1700" b="1" dirty="0"/>
-              <a:t>Ion shuttling:</a:t>
-            </a:r>
-          </a:p>
-          <a:p>
-            <a:pPr algn="l"/>
-            <a:r>
-              <a:rPr lang="en-GB" sz="1600" dirty="0"/>
-              <a:t>Ca⁺ ions can be moved between trap zones on a multi-zone trap chip without losing coherence. This is the basis for the ion reserve hopper - ions are stored in a holding zone and shuttled into the active grid on demand.</a:t>
-            </a:r>
+            <a:r>
+              <a:rPr lang="en-GB" dirty="0"/>
+              <a:t>While a pair of these enable communication across the solar system, it is restricted to the 2 devices:</a:t>
+            </a:r>
+          </a:p>
+          <a:p>
+            <a:r>
+              <a:rPr lang="en-GB" dirty="0"/>
+              <a:t>Mars &lt;-&gt; Earth</a:t>
+            </a:r>
+          </a:p>
+          <a:p>
+            <a:r>
+              <a:rPr lang="en-GB" dirty="0"/>
+              <a:t>Or Earth &lt;-&gt; Spaceship</a:t>
+            </a:r>
+          </a:p>
+          <a:p>
+            <a:endParaRPr lang="en-GB" dirty="0"/>
+          </a:p>
+          <a:p>
+            <a:r>
+              <a:rPr lang="en-GB" dirty="0"/>
+              <a:t>To overcome this limitation, imagine a “call centre” that houses all Earth bound transceivers (or a dedicated space station) - by housing and connecting them together, communication channels can be extended, for example:</a:t>
+            </a:r>
+          </a:p>
+          <a:p>
+            <a:r>
+              <a:rPr lang="en-GB" dirty="0"/>
+              <a:t>Mars wants to call a Ship orbiting Jupiter but the Ship only has 1 EMT that is entangled with a EMT on the “Call Centre Station”..</a:t>
+            </a:r>
+          </a:p>
+          <a:p>
+            <a:r>
+              <a:rPr lang="en-GB" dirty="0"/>
+              <a:t>Mars would call the Station and the Station would route the call using classical means in-between the multiple EMTs.</a:t>
+            </a:r>
+          </a:p>
+          <a:p>
+            <a:endParaRPr lang="en-GB" dirty="0"/>
+          </a:p>
+          <a:p>
+            <a:r>
+              <a:rPr lang="en-GB" dirty="0" err="1"/>
+              <a:t>DynamicDecoupling</a:t>
+            </a:r>
+            <a:endParaRPr lang="en-GB" dirty="0"/>
+          </a:p>
+          <a:p>
+            <a:r>
+              <a:rPr lang="en-GB" dirty="0"/>
+              <a:t>Continuous re-entanglement</a:t>
+            </a:r>
+          </a:p>
+          <a:p>
+            <a:r>
+              <a:rPr lang="en-GB" dirty="0"/>
+              <a:t>Calcium ions</a:t>
+            </a:r>
+          </a:p>
+          <a:p>
+            <a:endParaRPr lang="en-GB" dirty="0"/>
           </a:p>
         </p:txBody>
       </p:sp>
     </p:spTree>
+    <p:extLst>
+      <p:ext uri="{BB962C8B-B14F-4D97-AF65-F5344CB8AC3E}">
+        <p14:creationId xmlns:p14="http://schemas.microsoft.com/office/powerpoint/2010/main" val="2335475715"/>
+      </p:ext>
+    </p:extLst>
   </p:cSld>
   <p:clrMapOvr>
     <a:masterClrMapping/>
@@ -4974,7 +4899,7 @@
         <p:spPr>
           <a:xfrm>
             <a:off x="0" y="0"/>
-            <a:ext cx="6858000" cy="461665"/>
+            <a:ext cx="6858000" cy="800000"/>
           </a:xfrm>
           <a:prstGeom prst="rect">
             <a:avLst/>
@@ -4989,8 +4914,8 @@
           <a:p>
             <a:pPr algn="ctr"/>
             <a:r>
-              <a:rPr lang="en-GB" sz="2400" dirty="0"/>
-              <a:t>Dynamical Decoupling - Extending Coherence</a:t>
+              <a:rPr lang="en-GB" sz="2800" dirty="0"/>
+              <a:t>Calcium Ions as Particle Substrate</a:t>
             </a:r>
           </a:p>
         </p:txBody>
@@ -5004,7 +4929,7 @@
         <p:spPr>
           <a:xfrm>
             <a:off x="150113" y="1000000"/>
-            <a:ext cx="6563531" cy="6135013"/>
+            <a:ext cx="6563531" cy="7366119"/>
           </a:xfrm>
           <a:prstGeom prst="rect">
             <a:avLst/>
@@ -5020,7 +4945,7 @@
             <a:pPr algn="l"/>
             <a:r>
               <a:rPr lang="en-GB" sz="1600" dirty="0"/>
-              <a:t>Dynamical decoupling (DD) is a technique that extends the coherence time of a qubit by applying a continuous sequence of precisely timed refocusing pulses. The pulses cancel the effect of slow environmental noise - magnetic field fluctuations, phonon coupling, charge noise - by reversing accumulated phase error before it destroys the entanglement.</a:t>
+              <a:t>Calcium ions (Ca⁺) are the preferred substrate for the EMT. Unlike photons or NV centres, Ca⁺ ions are stationary qubits - they sit in an ion trap and hold their spin state indefinitely (with dynamical decoupling), rather than flying through a waveguide and needing to be caught in flight.</a:t>
             </a:r>
           </a:p>
           <a:p>
@@ -5035,42 +4960,42 @@
             </a:pPr>
             <a:r>
               <a:rPr lang="en-GB" sz="1700" b="1" dirty="0"/>
-              <a:t>Coherence times for Ca⁺ with DD:</a:t>
-            </a:r>
-          </a:p>
-          <a:p>
-            <a:pPr lvl="1" algn="l"/>
-            <a:r>
-              <a:rPr lang="en-GB" sz="1600" dirty="0"/>
-              <a:t>Electron spin, no DD:                ~1 millisecond</a:t>
-            </a:r>
-          </a:p>
-          <a:p>
-            <a:pPr lvl="1" algn="l"/>
-            <a:r>
-              <a:rPr lang="en-GB" sz="1600" dirty="0"/>
-              <a:t>Electron spin, CPMG-8 sequence:      ~1 second</a:t>
-            </a:r>
-          </a:p>
-          <a:p>
-            <a:pPr lvl="1" algn="l"/>
-            <a:r>
-              <a:rPr lang="en-GB" sz="1600" dirty="0"/>
-              <a:t>Nuclear spin, no DD:                 ~1 minute</a:t>
-            </a:r>
-          </a:p>
-          <a:p>
-            <a:pPr lvl="1" algn="l"/>
-            <a:r>
-              <a:rPr lang="en-GB" sz="1600" dirty="0"/>
-              <a:t>Nuclear spin, XY-64 DD sequence:     ~10 hours (demonstrated)</a:t>
-            </a:r>
-          </a:p>
-          <a:p>
-            <a:pPr lvl="1" algn="l"/>
-            <a:r>
-              <a:rPr lang="en-GB" sz="1600" dirty="0"/>
-              <a:t>Nuclear spin, optimal DD:            days (theoretical limit)</a:t>
+              <a:t>Key advantages over other substrates:</a:t>
+            </a:r>
+          </a:p>
+          <a:p>
+            <a:pPr lvl="1" algn="l"/>
+            <a:r>
+              <a:rPr lang="en-GB" sz="1600" dirty="0"/>
+              <a:t>Coherence: seconds to minutes (electron spin); up to 10 hours (nuclear spin, Ca-43 with dynamical decoupling).</a:t>
+            </a:r>
+          </a:p>
+          <a:p>
+            <a:pPr lvl="1" algn="l"/>
+            <a:r>
+              <a:rPr lang="en-GB" sz="1600" dirty="0"/>
+              <a:t>Write precision: microwave pulse at Larmor frequency sets orientation to any angle with &lt; 0.1 degree precision in nanoseconds.</a:t>
+            </a:r>
+          </a:p>
+          <a:p>
+            <a:pPr lvl="1" algn="l"/>
+            <a:r>
+              <a:rPr lang="en-GB" sz="1600" dirty="0"/>
+              <a:t>Read fidelity: state-selective fluorescence at 397 nm. Readout fidelity &gt; 99.9% per shot - significantly better than NV-centre alternatives (~95%).</a:t>
+            </a:r>
+          </a:p>
+          <a:p>
+            <a:pPr lvl="1" algn="l"/>
+            <a:r>
+              <a:rPr lang="en-GB" sz="1600" dirty="0"/>
+              <a:t>Trap compatibility: Ca⁺ is confined by oscillating electric fields in a Paul trap. The magnetic manipulation field operates at a completely different frequency and does not disturb the trap - this is standard in all ion trap experiments.</a:t>
+            </a:r>
+          </a:p>
+          <a:p>
+            <a:pPr lvl="1" algn="l"/>
+            <a:r>
+              <a:rPr lang="en-GB" sz="1600" dirty="0"/>
+              <a:t>Entanglement: Molmer-Sorensen gate entangles ions in the same trap via their shared Coulomb motional mode. For remote re-entanglement, the Delft photon-mediated method is used - each ion emits an entanglement photon, the photons meet at a Bell measurement, and the classical result coordinates the ion correction.</a:t>
             </a:r>
           </a:p>
           <a:p>
@@ -5085,25 +5010,14 @@
             </a:pPr>
             <a:r>
               <a:rPr lang="en-GB" sz="1700" b="1" dirty="0"/>
-              <a:t>Application to EMT:</a:t>
-            </a:r>
-          </a:p>
-          <a:p>
-            <a:pPr algn="l"/>
-            <a:r>
-              <a:rPr lang="en-GB" sz="1600" dirty="0"/>
-              <a:t>The MCU runs the DD pulse sequence continuously on all active rows while the EMT is operating. The DD pulses are interleaved between transmission dwell windows. No additional hardware is required beyond the existing coil array - the same miniature coils used for orientation writing also deliver the DD pulses.</a:t>
-            </a:r>
-          </a:p>
-          <a:p>
-            <a:pPr algn="l"/>
-            <a:endParaRPr lang="en-GB" sz="1600" dirty="0"/>
-          </a:p>
-          <a:p>
-            <a:pPr algn="l"/>
-            <a:r>
-              <a:rPr lang="en-GB" sz="1600" dirty="0"/>
-              <a:t>With nuclear spin encoding and DD, a single EMT grid achieves an effective coherence window of hours to days, covering the entire inner solar system for seamless re-entanglement coordination via the system channel.</a:t>
+              <a:t>Ion shuttling:</a:t>
+            </a:r>
+          </a:p>
+          <a:p>
+            <a:pPr algn="l"/>
+            <a:r>
+              <a:rPr lang="en-GB" sz="1600" dirty="0"/>
+              <a:t>Ca⁺ ions can be moved between trap zones on a multi-zone trap chip without losing coherence. This is the basis for the ion reserve hopper - ions are stored in a holding zone and shuttled into the active grid on demand.</a:t>
             </a:r>
           </a:p>
         </p:txBody>
@@ -5158,7 +5072,7 @@
             <a:pPr algn="ctr"/>
             <a:r>
               <a:rPr lang="en-GB" sz="2400" dirty="0"/>
-              <a:t>Continuous Re-entanglement - The Seed Protocol</a:t>
+              <a:t>Dynamical Decoupling - Extending Coherence</a:t>
             </a:r>
           </a:p>
         </p:txBody>
@@ -5172,7 +5086,7 @@
         <p:spPr>
           <a:xfrm>
             <a:off x="150113" y="1000000"/>
-            <a:ext cx="6563531" cy="7186583"/>
+            <a:ext cx="6563531" cy="6135013"/>
           </a:xfrm>
           <a:prstGeom prst="rect">
             <a:avLst/>
@@ -5188,7 +5102,7 @@
             <a:pPr algn="l"/>
             <a:r>
               <a:rPr lang="en-GB" sz="1600" dirty="0"/>
-              <a:t>Even with dynamical decoupling, entangled pairs eventually decohere. The EMT uses a continuous self-healing protocol to refresh decohered pairs from a reserve of ordinary unentangled Ca⁺ ions, coordinated via a dedicated system channel running on a reserved portion of the active grid.</a:t>
+              <a:t>Dynamical decoupling (DD) is a technique that extends the coherence time of a qubit by applying a continuous sequence of precisely timed refocusing pulses. The pulses cancel the effect of slow environmental noise - magnetic field fluctuations, phonon coupling, charge noise - by reversing accumulated phase error before it destroys the entanglement.</a:t>
             </a:r>
           </a:p>
           <a:p>
@@ -5203,14 +5117,42 @@
             </a:pPr>
             <a:r>
               <a:rPr lang="en-GB" sz="1700" b="1" dirty="0"/>
-              <a:t>What the system channel carries:</a:t>
-            </a:r>
-          </a:p>
-          <a:p>
-            <a:pPr lvl="1" algn="l"/>
-            <a:r>
-              <a:rPr lang="en-GB" sz="1600" dirty="0"/>
-              <a:t>Coherence quality reports per row, row refresh requests, Bell measurement results, correction pulse parameters, ion reserve status, dynamical decoupling sync.</a:t>
+              <a:t>Coherence times for Ca⁺ with DD:</a:t>
+            </a:r>
+          </a:p>
+          <a:p>
+            <a:pPr lvl="1" algn="l"/>
+            <a:r>
+              <a:rPr lang="en-GB" sz="1600" dirty="0"/>
+              <a:t>Electron spin, no DD:                ~1 millisecond</a:t>
+            </a:r>
+          </a:p>
+          <a:p>
+            <a:pPr lvl="1" algn="l"/>
+            <a:r>
+              <a:rPr lang="en-GB" sz="1600" dirty="0"/>
+              <a:t>Electron spin, CPMG-8 sequence:      ~1 second</a:t>
+            </a:r>
+          </a:p>
+          <a:p>
+            <a:pPr lvl="1" algn="l"/>
+            <a:r>
+              <a:rPr lang="en-GB" sz="1600" dirty="0"/>
+              <a:t>Nuclear spin, no DD:                 ~1 minute</a:t>
+            </a:r>
+          </a:p>
+          <a:p>
+            <a:pPr lvl="1" algn="l"/>
+            <a:r>
+              <a:rPr lang="en-GB" sz="1600" dirty="0"/>
+              <a:t>Nuclear spin, XY-64 DD sequence:     ~10 hours (demonstrated)</a:t>
+            </a:r>
+          </a:p>
+          <a:p>
+            <a:pPr lvl="1" algn="l"/>
+            <a:r>
+              <a:rPr lang="en-GB" sz="1600" dirty="0"/>
+              <a:t>Nuclear spin, optimal DD:            days (theoretical limit)</a:t>
             </a:r>
           </a:p>
           <a:p>
@@ -5225,49 +5167,14 @@
             </a:pPr>
             <a:r>
               <a:rPr lang="en-GB" sz="1700" b="1" dirty="0"/>
-              <a:t>Bootstrap re-entanglement sequence:</a:t>
-            </a:r>
-          </a:p>
-          <a:p>
-            <a:pPr lvl="1" algn="l"/>
-            <a:r>
-              <a:rPr lang="en-GB" sz="1600" dirty="0"/>
-              <a:t>1. MCU monitors coherence quality per row continuously.</a:t>
-            </a:r>
-          </a:p>
-          <a:p>
-            <a:pPr lvl="1" algn="l"/>
-            <a:r>
-              <a:rPr lang="en-GB" sz="1600" dirty="0"/>
-              <a:t>2. Row drops below threshold - system channel flags the row ID to remote unit.</a:t>
-            </a:r>
-          </a:p>
-          <a:p>
-            <a:pPr lvl="1" algn="l"/>
-            <a:r>
-              <a:rPr lang="en-GB" sz="1600" dirty="0"/>
-              <a:t>3. Both units simultaneously excite a reserve Ca⁺ ion, emitting an entanglement photon via the Delft protocol.</a:t>
-            </a:r>
-          </a:p>
-          <a:p>
-            <a:pPr lvl="1" algn="l"/>
-            <a:r>
-              <a:rPr lang="en-GB" sz="1600" dirty="0"/>
-              <a:t>4. Bell measurement performed at one site. Classical result sent on system channel.</a:t>
-            </a:r>
-          </a:p>
-          <a:p>
-            <a:pPr lvl="1" algn="l"/>
-            <a:r>
-              <a:rPr lang="en-GB" sz="1600" dirty="0"/>
-              <a:t>5. Correction pulses applied. Reserve ion is now entangled - shuttled into the active grid to replace the decohered row.</a:t>
-            </a:r>
-          </a:p>
-          <a:p>
-            <a:pPr lvl="1" algn="l"/>
-            <a:r>
-              <a:rPr lang="en-GB" sz="1600" dirty="0"/>
-              <a:t>6. Dynamical decoupling activated on the new pair immediately.</a:t>
+              <a:t>Application to EMT:</a:t>
+            </a:r>
+          </a:p>
+          <a:p>
+            <a:pPr algn="l"/>
+            <a:r>
+              <a:rPr lang="en-GB" sz="1600" dirty="0"/>
+              <a:t>The MCU runs the DD pulse sequence continuously on all active rows while the EMT is operating. The DD pulses are interleaved between transmission dwell windows. No additional hardware is required beyond the existing coil array - the same miniature coils used for orientation writing also deliver the DD pulses.</a:t>
             </a:r>
           </a:p>
           <a:p>
@@ -5275,21 +5182,10 @@
             <a:endParaRPr lang="en-GB" sz="1600" dirty="0"/>
           </a:p>
           <a:p>
-            <a:pPr algn="l">
-              <a:spcBef>
-                <a:spcPts val="400"/>
-              </a:spcBef>
-            </a:pPr>
-            <a:r>
-              <a:rPr lang="en-GB" sz="1700" b="1" dirty="0"/>
-              <a:t>Ion reserve:</a:t>
-            </a:r>
-          </a:p>
-          <a:p>
-            <a:pPr algn="l"/>
-            <a:r>
-              <a:rPr lang="en-GB" sz="1600" dirty="0"/>
-              <a:t>Ordinary unentangled Ca⁺ ions held in a storage zone of the trap chip. Replenished by photoionisation of neutral calcium metal from a small on-board source. Calcium is a common non-toxic metal. The reserve requires no entanglement - it is simply a supply of raw ions.</a:t>
+            <a:pPr algn="l"/>
+            <a:r>
+              <a:rPr lang="en-GB" sz="1600" dirty="0"/>
+              <a:t>With nuclear spin encoding and DD, a single EMT grid achieves an effective coherence window of hours to days, covering the entire inner solar system for seamless re-entanglement coordination via the system channel.</a:t>
             </a:r>
           </a:p>
         </p:txBody>
@@ -5344,7 +5240,7 @@
             <a:pPr algn="ctr"/>
             <a:r>
               <a:rPr lang="en-GB" sz="2400" dirty="0"/>
-              <a:t>Self-Healing Grid - From One Seed Pair</a:t>
+              <a:t>Continuous Re-entanglement - The Seed Protocol</a:t>
             </a:r>
           </a:p>
         </p:txBody>
@@ -5358,7 +5254,7 @@
         <p:spPr>
           <a:xfrm>
             <a:off x="150113" y="1000000"/>
-            <a:ext cx="6563531" cy="8677400"/>
+            <a:ext cx="6563531" cy="7186583"/>
           </a:xfrm>
           <a:prstGeom prst="rect">
             <a:avLst/>
@@ -5374,7 +5270,7 @@
             <a:pPr algn="l"/>
             <a:r>
               <a:rPr lang="en-GB" sz="1600" dirty="0"/>
-              <a:t>The most efficient form of the protocol starts from a single pre-entangled pair at manufacture. All other ions in the reserve are unentangled and cheap. The grid builds itself through an exponential bootstrap process.</a:t>
+              <a:t>Even with dynamical decoupling, entangled pairs eventually decohere. The EMT uses a continuous self-healing protocol to refresh decohered pairs from a reserve of ordinary unentangled Ca⁺ ions, coordinated via a dedicated system channel running on a reserved portion of the active grid.</a:t>
             </a:r>
           </a:p>
           <a:p>
@@ -5389,42 +5285,14 @@
             </a:pPr>
             <a:r>
               <a:rPr lang="en-GB" sz="1700" b="1" dirty="0"/>
-              <a:t>Exponential bootstrap:</a:t>
-            </a:r>
-          </a:p>
-          <a:p>
-            <a:pPr lvl="1" algn="l"/>
-            <a:r>
-              <a:rPr lang="en-GB" sz="1600" dirty="0"/>
-              <a:t>Step 1: Seed pair (1 entangled pair) is operational.</a:t>
-            </a:r>
-          </a:p>
-          <a:p>
-            <a:pPr lvl="1" algn="l"/>
-            <a:r>
-              <a:rPr lang="en-GB" sz="1600" dirty="0"/>
-              <a:t>Step 2: Use seed as system channel. Bootstrap pair 2 via Delft protocol.</a:t>
-            </a:r>
-          </a:p>
-          <a:p>
-            <a:pPr lvl="1" algn="l"/>
-            <a:r>
-              <a:rPr lang="en-GB" sz="1600" dirty="0"/>
-              <a:t>Step 3: Use pairs 1 and 2 as channel and resource. Bootstrap pairs 3 and 4.</a:t>
-            </a:r>
-          </a:p>
-          <a:p>
-            <a:pPr lvl="1" algn="l"/>
-            <a:r>
-              <a:rPr lang="en-GB" sz="1600" dirty="0"/>
-              <a:t>Step N: After N generations, grid contains 2ᵏ entangled pairs.</a:t>
-            </a:r>
-          </a:p>
-          <a:p>
-            <a:pPr lvl="1" algn="l"/>
-            <a:r>
-              <a:rPr lang="en-GB" sz="1600" dirty="0"/>
-              <a:t>10 generations builds 1,024 pairs. 14 generations builds 16,384 pairs.</a:t>
+              <a:t>What the system channel carries:</a:t>
+            </a:r>
+          </a:p>
+          <a:p>
+            <a:pPr lvl="1" algn="l"/>
+            <a:r>
+              <a:rPr lang="en-GB" sz="1600" dirty="0"/>
+              <a:t>Coherence quality reports per row, row refresh requests, Bell measurement results, correction pulse parameters, ion reserve status, dynamical decoupling sync.</a:t>
             </a:r>
           </a:p>
           <a:p>
@@ -5439,14 +5307,49 @@
             </a:pPr>
             <a:r>
               <a:rPr lang="en-GB" sz="1700" b="1" dirty="0"/>
-              <a:t>Ongoing self-maintenance:</a:t>
-            </a:r>
-          </a:p>
-          <a:p>
-            <a:pPr algn="l"/>
-            <a:r>
-              <a:rPr lang="en-GB" sz="1600" dirty="0"/>
-              <a:t>Once the full grid is operational, the same protocol runs continuously. Decohered rows are detected, flagged on the system channel, and replaced from the ion reserve. The reserve is topped up from the calcium source. The system never runs out as long as the calcium source is non-empty.</a:t>
+              <a:t>Bootstrap re-entanglement sequence:</a:t>
+            </a:r>
+          </a:p>
+          <a:p>
+            <a:pPr lvl="1" algn="l"/>
+            <a:r>
+              <a:rPr lang="en-GB" sz="1600" dirty="0"/>
+              <a:t>1. MCU monitors coherence quality per row continuously.</a:t>
+            </a:r>
+          </a:p>
+          <a:p>
+            <a:pPr lvl="1" algn="l"/>
+            <a:r>
+              <a:rPr lang="en-GB" sz="1600" dirty="0"/>
+              <a:t>2. Row drops below threshold - system channel flags the row ID to remote unit.</a:t>
+            </a:r>
+          </a:p>
+          <a:p>
+            <a:pPr lvl="1" algn="l"/>
+            <a:r>
+              <a:rPr lang="en-GB" sz="1600" dirty="0"/>
+              <a:t>3. Both units simultaneously excite a reserve Ca⁺ ion, emitting an entanglement photon via the Delft protocol.</a:t>
+            </a:r>
+          </a:p>
+          <a:p>
+            <a:pPr lvl="1" algn="l"/>
+            <a:r>
+              <a:rPr lang="en-GB" sz="1600" dirty="0"/>
+              <a:t>4. Bell measurement performed at one site. Classical result sent on system channel.</a:t>
+            </a:r>
+          </a:p>
+          <a:p>
+            <a:pPr lvl="1" algn="l"/>
+            <a:r>
+              <a:rPr lang="en-GB" sz="1600" dirty="0"/>
+              <a:t>5. Correction pulses applied. Reserve ion is now entangled - shuttled into the active grid to replace the decohered row.</a:t>
+            </a:r>
+          </a:p>
+          <a:p>
+            <a:pPr lvl="1" algn="l"/>
+            <a:r>
+              <a:rPr lang="en-GB" sz="1600" dirty="0"/>
+              <a:t>6. Dynamical decoupling activated on the new pair immediately.</a:t>
             </a:r>
           </a:p>
           <a:p>
@@ -5461,14 +5364,14 @@
             </a:pPr>
             <a:r>
               <a:rPr lang="en-GB" sz="1700" b="1" dirty="0"/>
-              <a:t>Key insight:</a:t>
-            </a:r>
-          </a:p>
-          <a:p>
-            <a:pPr algn="l"/>
-            <a:r>
-              <a:rPr lang="en-GB" sz="1600" dirty="0"/>
-              <a:t>The self-healing protocol is itself a test of whether the EMT channel works. A grid that successfully maintains itself at interplanetary distance confirms the EMT channel is operational. The device is the experiment.</a:t>
+              <a:t>Ion reserve:</a:t>
+            </a:r>
+          </a:p>
+          <a:p>
+            <a:pPr algn="l"/>
+            <a:r>
+              <a:rPr lang="en-GB" sz="1600" dirty="0"/>
+              <a:t>Ordinary unentangled Ca⁺ ions held in a storage zone of the trap chip. Replenished by photoionisation of neutral calcium metal from a small on-board source. Calcium is a common non-toxic metal. The reserve requires no entanglement - it is simply a supply of raw ions.</a:t>
             </a:r>
           </a:p>
         </p:txBody>
@@ -5523,7 +5426,7 @@
             <a:pPr algn="ctr"/>
             <a:r>
               <a:rPr lang="en-GB" sz="2400" dirty="0"/>
-              <a:t>Refresh Rate vs Decoherence Rate - Mathematics</a:t>
+              <a:t>Self-Healing Grid - From One Seed Pair</a:t>
             </a:r>
           </a:p>
         </p:txBody>
@@ -5537,7 +5440,7 @@
         <p:spPr>
           <a:xfrm>
             <a:off x="150113" y="1000000"/>
-            <a:ext cx="6563531" cy="6483826"/>
+            <a:ext cx="6563531" cy="8677400"/>
           </a:xfrm>
           <a:prstGeom prst="rect">
             <a:avLst/>
@@ -5553,7 +5456,7 @@
             <a:pPr algn="l"/>
             <a:r>
               <a:rPr lang="en-GB" sz="1600" dirty="0"/>
-              <a:t>For the self-healing grid to be stable, the refresh rate must exceed the decoherence rate. The condition is derived formally below.</a:t>
+              <a:t>The most efficient form of the protocol starts from a single pre-entangled pair at manufacture. All other ions in the reserve are unentangled and cheap. The grid builds itself through an exponential bootstrap process.</a:t>
             </a:r>
           </a:p>
           <a:p>
@@ -5568,86 +5471,47 @@
             </a:pPr>
             <a:r>
               <a:rPr lang="en-GB" sz="1700" b="1" dirty="0"/>
-              <a:t>Definitions:</a:t>
-            </a:r>
-          </a:p>
-          <a:p>
-            <a:pPr algn="l"/>
-            <a:r>
-              <a:rPr lang="en-GB" sz="1300" dirty="0">
-                <a:latin typeface="Courier New"/>
-              </a:rPr>
-              <a:t>  N_grid    = total entangled pairs in active grid</a:t>
-            </a:r>
-          </a:p>
-          <a:p>
-            <a:pPr algn="l"/>
-            <a:r>
-              <a:rPr lang="en-GB" sz="1300" dirty="0">
-                <a:latin typeface="Courier New"/>
-              </a:rPr>
-              <a:t>  τ_c       = coherence time per pair (with DD)</a:t>
-            </a:r>
-          </a:p>
-          <a:p>
-            <a:pPr algn="l"/>
-            <a:r>
-              <a:rPr lang="en-GB" sz="1300" dirty="0">
-                <a:latin typeface="Courier New"/>
-              </a:rPr>
-              <a:t>  R_d       = decoherence rate = N_grid / τ_c  [pairs/s]</a:t>
-            </a:r>
-          </a:p>
-          <a:p>
-            <a:pPr algn="l"/>
-            <a:r>
-              <a:rPr lang="en-GB" sz="1300" dirty="0">
-                <a:latin typeface="Courier New"/>
-              </a:rPr>
-              <a:t>  t_refresh = time to bootstrap one new pair</a:t>
-            </a:r>
-          </a:p>
-          <a:p>
-            <a:pPr algn="l"/>
-            <a:r>
-              <a:rPr lang="en-GB" sz="1300" dirty="0">
-                <a:latin typeface="Courier New"/>
-              </a:rPr>
-              <a:t>  R_r       = refresh rate = 1 / t_refresh    [pairs/s]</a:t>
-            </a:r>
-          </a:p>
-          <a:p>
-            <a:pPr algn="l"/>
-            <a:r>
-              <a:rPr lang="en-GB" sz="1300" dirty="0">
-                <a:latin typeface="Courier New"/>
-              </a:rPr>
-              <a:t>  N_sys     = rows reserved for system channel</a:t>
-            </a:r>
-          </a:p>
-          <a:p>
-            <a:pPr algn="l"/>
-            <a:r>
-              <a:rPr lang="en-GB" sz="1300" dirty="0">
-                <a:latin typeface="Courier New"/>
-              </a:rPr>
-              <a:t>  B_sys     = system channel bandwidth  [chars/s]</a:t>
-            </a:r>
-          </a:p>
-          <a:p>
-            <a:pPr algn="l"/>
-            <a:r>
-              <a:rPr lang="en-GB" sz="1300" dirty="0">
-                <a:latin typeface="Courier New"/>
-              </a:rPr>
-              <a:t>  C_proto   = chars needed per refresh cycle</a:t>
-            </a:r>
-          </a:p>
-          <a:p>
-            <a:pPr algn="l"/>
-            <a:endParaRPr lang="en-GB" sz="1300" dirty="0">
-              <a:latin typeface="Courier New"/>
-            </a:endParaRPr>
+              <a:t>Exponential bootstrap:</a:t>
+            </a:r>
+          </a:p>
+          <a:p>
+            <a:pPr lvl="1" algn="l"/>
+            <a:r>
+              <a:rPr lang="en-GB" sz="1600" dirty="0"/>
+              <a:t>Step 1: Seed pair (1 entangled pair) is operational.</a:t>
+            </a:r>
+          </a:p>
+          <a:p>
+            <a:pPr lvl="1" algn="l"/>
+            <a:r>
+              <a:rPr lang="en-GB" sz="1600" dirty="0"/>
+              <a:t>Step 2: Use seed as system channel. Bootstrap pair 2 via Delft protocol.</a:t>
+            </a:r>
+          </a:p>
+          <a:p>
+            <a:pPr lvl="1" algn="l"/>
+            <a:r>
+              <a:rPr lang="en-GB" sz="1600" dirty="0"/>
+              <a:t>Step 3: Use pairs 1 and 2 as channel and resource. Bootstrap pairs 3 and 4.</a:t>
+            </a:r>
+          </a:p>
+          <a:p>
+            <a:pPr lvl="1" algn="l"/>
+            <a:r>
+              <a:rPr lang="en-GB" sz="1600" dirty="0"/>
+              <a:t>Step N: After N generations, grid contains 2ᵏ entangled pairs.</a:t>
+            </a:r>
+          </a:p>
+          <a:p>
+            <a:pPr lvl="1" algn="l"/>
+            <a:r>
+              <a:rPr lang="en-GB" sz="1600" dirty="0"/>
+              <a:t>10 generations builds 1,024 pairs. 14 generations builds 16,384 pairs.</a:t>
+            </a:r>
+          </a:p>
+          <a:p>
+            <a:pPr algn="l"/>
+            <a:endParaRPr lang="en-GB" sz="1600" dirty="0"/>
           </a:p>
           <a:p>
             <a:pPr algn="l">
@@ -5657,41 +5521,19 @@
             </a:pPr>
             <a:r>
               <a:rPr lang="en-GB" sz="1700" b="1" dirty="0"/>
-              <a:t>Stability condition:</a:t>
-            </a:r>
-          </a:p>
-          <a:p>
-            <a:pPr algn="l"/>
-            <a:r>
-              <a:rPr lang="en-GB" sz="1300" dirty="0">
-                <a:latin typeface="Courier New"/>
-              </a:rPr>
-              <a:t>  R_r &gt; R_d</a:t>
-            </a:r>
-          </a:p>
-          <a:p>
-            <a:pPr algn="l"/>
-            <a:r>
-              <a:rPr lang="en-GB" sz="1300" dirty="0">
-                <a:latin typeface="Courier New"/>
-              </a:rPr>
-              <a:t>  1 / t_refresh  &gt;  N_grid / τ_c</a:t>
-            </a:r>
-          </a:p>
-          <a:p>
-            <a:pPr algn="l"/>
-            <a:r>
-              <a:rPr lang="en-GB" sz="1300" dirty="0">
-                <a:latin typeface="Courier New"/>
-              </a:rPr>
-              <a:t>  τ_c  &gt;  N_grid × t_refresh</a:t>
-            </a:r>
-          </a:p>
-          <a:p>
-            <a:pPr algn="l"/>
-            <a:endParaRPr lang="en-GB" sz="1300" dirty="0">
-              <a:latin typeface="Courier New"/>
-            </a:endParaRPr>
+              <a:t>Ongoing self-maintenance:</a:t>
+            </a:r>
+          </a:p>
+          <a:p>
+            <a:pPr algn="l"/>
+            <a:r>
+              <a:rPr lang="en-GB" sz="1600" dirty="0"/>
+              <a:t>Once the full grid is operational, the same protocol runs continuously. Decohered rows are detected, flagged on the system channel, and replaced from the ion reserve. The reserve is topped up from the calcium source. The system never runs out as long as the calcium source is non-empty.</a:t>
+            </a:r>
+          </a:p>
+          <a:p>
+            <a:pPr algn="l"/>
+            <a:endParaRPr lang="en-GB" sz="1600" dirty="0"/>
           </a:p>
           <a:p>
             <a:pPr algn="l">
@@ -5701,87 +5543,14 @@
             </a:pPr>
             <a:r>
               <a:rPr lang="en-GB" sz="1700" b="1" dirty="0"/>
-              <a:t>Worked example - Ca⁺ electron spin + DD (τ_c = 10 min):</a:t>
-            </a:r>
-          </a:p>
-          <a:p>
-            <a:pPr algn="l"/>
-            <a:r>
-              <a:rPr lang="en-GB" sz="1300" dirty="0">
-                <a:latin typeface="Courier New"/>
-              </a:rPr>
-              <a:t>  N_grid = 10,000    R_d = 10,000 / 600 = 16.7 pairs/s</a:t>
-            </a:r>
-          </a:p>
-          <a:p>
-            <a:pPr algn="l"/>
-            <a:r>
-              <a:rPr lang="en-GB" sz="1300" dirty="0">
-                <a:latin typeface="Courier New"/>
-              </a:rPr>
-              <a:t>  B_sys (5 rows, 100ms dwell) = 50 chars/s</a:t>
-            </a:r>
-          </a:p>
-          <a:p>
-            <a:pPr algn="l"/>
-            <a:r>
-              <a:rPr lang="en-GB" sz="1300" dirty="0">
-                <a:latin typeface="Courier New"/>
-              </a:rPr>
-              <a:t>  C_proto = 10 chars/refresh  →  R_r = 50/10 = 5.0 pairs/s</a:t>
-            </a:r>
-          </a:p>
-          <a:p>
-            <a:pPr algn="l"/>
-            <a:r>
-              <a:rPr lang="en-GB" sz="1300" dirty="0">
-                <a:latin typeface="Courier New"/>
-              </a:rPr>
-              <a:t>  5.0 &lt; 16.7  ←  NOT stable at 5 system rows</a:t>
-            </a:r>
-          </a:p>
-          <a:p>
-            <a:pPr algn="l"/>
-            <a:endParaRPr lang="en-GB" sz="1300" dirty="0">
-              <a:latin typeface="Courier New"/>
-            </a:endParaRPr>
-          </a:p>
-          <a:p>
-            <a:pPr algn="l">
-              <a:spcBef>
-                <a:spcPts val="400"/>
-              </a:spcBef>
-            </a:pPr>
-            <a:r>
-              <a:rPr lang="en-GB" sz="1700" b="1" dirty="0"/>
-              <a:t>Required system rows:</a:t>
-            </a:r>
-          </a:p>
-          <a:p>
-            <a:pPr algn="l"/>
-            <a:r>
-              <a:rPr lang="en-GB" sz="1300" dirty="0">
-                <a:latin typeface="Courier New"/>
-              </a:rPr>
-              <a:t>  N_sys_min = ceil(N_grid × C_proto × t_dwell / τ_c)</a:t>
-            </a:r>
-          </a:p>
-          <a:p>
-            <a:pPr algn="l"/>
-            <a:r>
-              <a:rPr lang="en-GB" sz="1300" dirty="0">
-                <a:latin typeface="Courier New"/>
-              </a:rPr>
-              <a:t>  N_sys_min = ceil(10,000 × 10 × 0.1 / 600) = ceil(16.7) = 17 rows</a:t>
-            </a:r>
-          </a:p>
-          <a:p>
-            <a:pPr algn="l"/>
-            <a:r>
-              <a:rPr lang="en-GB" sz="1300" dirty="0">
-                <a:latin typeface="Courier New"/>
-              </a:rPr>
-              <a:t>  ∴ Reserve at least 17 system rows (17% of a 100-row grid)</a:t>
+              <a:t>Key insight:</a:t>
+            </a:r>
+          </a:p>
+          <a:p>
+            <a:pPr algn="l"/>
+            <a:r>
+              <a:rPr lang="en-GB" sz="1600" dirty="0"/>
+              <a:t>The self-healing protocol is itself a test of whether the EMT channel works. A grid that successfully maintains itself at interplanetary distance confirms the EMT channel is operational. The device is the experiment.</a:t>
             </a:r>
           </a:p>
         </p:txBody>
@@ -5836,7 +5605,7 @@
             <a:pPr algn="ctr"/>
             <a:r>
               <a:rPr lang="en-GB" sz="2400" dirty="0"/>
-              <a:t>Refresh Rate Mathematics - Extended Cases</a:t>
+              <a:t>Refresh Rate vs Decoherence Rate - Mathematics</a:t>
             </a:r>
           </a:p>
         </p:txBody>
@@ -5850,7 +5619,7 @@
         <p:spPr>
           <a:xfrm>
             <a:off x="150113" y="1000000"/>
-            <a:ext cx="6563531" cy="6432530"/>
+            <a:ext cx="6563531" cy="6483826"/>
           </a:xfrm>
           <a:prstGeom prst="rect">
             <a:avLst/>
@@ -5862,6 +5631,17 @@
             <a:spAutoFit/>
           </a:bodyPr>
           <a:lstStyle/>
+          <a:p>
+            <a:pPr algn="l"/>
+            <a:r>
+              <a:rPr lang="en-GB" sz="1600" dirty="0"/>
+              <a:t>For the self-healing grid to be stable, the refresh rate must exceed the decoherence rate. The condition is derived formally below.</a:t>
+            </a:r>
+          </a:p>
+          <a:p>
+            <a:pPr algn="l"/>
+            <a:endParaRPr lang="en-GB" sz="1600" dirty="0"/>
+          </a:p>
           <a:p>
             <a:pPr algn="l">
               <a:spcBef>
@@ -5870,7 +5650,7 @@
             </a:pPr>
             <a:r>
               <a:rPr lang="en-GB" sz="1700" b="1" dirty="0"/>
-              <a:t>With Ca⁺ nuclear spin + DD (τ_c = 10 hours = 36,000 s):</a:t>
+              <a:t>Definitions:</a:t>
             </a:r>
           </a:p>
           <a:p>
@@ -5879,7 +5659,7 @@
               <a:rPr lang="en-GB" sz="1300" dirty="0">
                 <a:latin typeface="Courier New"/>
               </a:rPr>
-              <a:t>  N_sys_min = ceil(10,000 × 10 × 0.1 / 36,000)</a:t>
+              <a:t>  N_grid    = total entangled pairs in active grid</a:t>
             </a:r>
           </a:p>
           <a:p>
@@ -5888,7 +5668,7 @@
               <a:rPr lang="en-GB" sz="1300" dirty="0">
                 <a:latin typeface="Courier New"/>
               </a:rPr>
-              <a:t>            = ceil(0.28)  =  1 row</a:t>
+              <a:t>  τ_c       = coherence time per pair (with DD)</a:t>
             </a:r>
           </a:p>
           <a:p>
@@ -5897,7 +5677,52 @@
               <a:rPr lang="en-GB" sz="1300" dirty="0">
                 <a:latin typeface="Courier New"/>
               </a:rPr>
-              <a:t>  ∴ A SINGLE system row maintains 10,000 pairs indefinitely.</a:t>
+              <a:t>  R_d       = decoherence rate = N_grid / τ_c  [pairs/s]</a:t>
+            </a:r>
+          </a:p>
+          <a:p>
+            <a:pPr algn="l"/>
+            <a:r>
+              <a:rPr lang="en-GB" sz="1300" dirty="0">
+                <a:latin typeface="Courier New"/>
+              </a:rPr>
+              <a:t>  t_refresh = time to bootstrap one new pair</a:t>
+            </a:r>
+          </a:p>
+          <a:p>
+            <a:pPr algn="l"/>
+            <a:r>
+              <a:rPr lang="en-GB" sz="1300" dirty="0">
+                <a:latin typeface="Courier New"/>
+              </a:rPr>
+              <a:t>  R_r       = refresh rate = 1 / t_refresh    [pairs/s]</a:t>
+            </a:r>
+          </a:p>
+          <a:p>
+            <a:pPr algn="l"/>
+            <a:r>
+              <a:rPr lang="en-GB" sz="1300" dirty="0">
+                <a:latin typeface="Courier New"/>
+              </a:rPr>
+              <a:t>  N_sys     = rows reserved for system channel</a:t>
+            </a:r>
+          </a:p>
+          <a:p>
+            <a:pPr algn="l"/>
+            <a:r>
+              <a:rPr lang="en-GB" sz="1300" dirty="0">
+                <a:latin typeface="Courier New"/>
+              </a:rPr>
+              <a:t>  B_sys     = system channel bandwidth  [chars/s]</a:t>
+            </a:r>
+          </a:p>
+          <a:p>
+            <a:pPr algn="l"/>
+            <a:r>
+              <a:rPr lang="en-GB" sz="1300" dirty="0">
+                <a:latin typeface="Courier New"/>
+              </a:rPr>
+              <a:t>  C_proto   = chars needed per refresh cycle</a:t>
             </a:r>
           </a:p>
           <a:p>
@@ -5914,7 +5739,7 @@
             </a:pPr>
             <a:r>
               <a:rPr lang="en-GB" sz="1700" b="1" dirty="0"/>
-              <a:t>General formula:</a:t>
+              <a:t>Stability condition:</a:t>
             </a:r>
           </a:p>
           <a:p>
@@ -5923,7 +5748,7 @@
               <a:rPr lang="en-GB" sz="1300" dirty="0">
                 <a:latin typeface="Courier New"/>
               </a:rPr>
-              <a:t>  f_sys = N_sys / N_total = C_proto × t_dwell / τ_c</a:t>
+              <a:t>  R_r &gt; R_d</a:t>
             </a:r>
           </a:p>
           <a:p>
@@ -5932,7 +5757,16 @@
               <a:rPr lang="en-GB" sz="1300" dirty="0">
                 <a:latin typeface="Courier New"/>
               </a:rPr>
-              <a:t>  As τ_c increases, the system channel overhead tends toward zero.</a:t>
+              <a:t>  1 / t_refresh  &gt;  N_grid / τ_c</a:t>
+            </a:r>
+          </a:p>
+          <a:p>
+            <a:pPr algn="l"/>
+            <a:r>
+              <a:rPr lang="en-GB" sz="1300" dirty="0">
+                <a:latin typeface="Courier New"/>
+              </a:rPr>
+              <a:t>  τ_c  &gt;  N_grid × t_refresh</a:t>
             </a:r>
           </a:p>
           <a:p>
@@ -5949,7 +5783,7 @@
             </a:pPr>
             <a:r>
               <a:rPr lang="en-GB" sz="1700" b="1" dirty="0"/>
-              <a:t>Ion reserve buffer size (with bootstrap, not pre-loaded):</a:t>
+              <a:t>Worked example - Ca⁺ electron spin + DD (τ_c = 10 min):</a:t>
             </a:r>
           </a:p>
           <a:p>
@@ -5958,7 +5792,7 @@
               <a:rPr lang="en-GB" sz="1300" dirty="0">
                 <a:latin typeface="Courier New"/>
               </a:rPr>
-              <a:t>  N_buffer = R_d × t_refresh × safety_factor</a:t>
+              <a:t>  N_grid = 10,000    R_d = 10,000 / 600 = 16.7 pairs/s</a:t>
             </a:r>
           </a:p>
           <a:p>
@@ -5967,7 +5801,7 @@
               <a:rPr lang="en-GB" sz="1300" dirty="0">
                 <a:latin typeface="Courier New"/>
               </a:rPr>
-              <a:t>           = 16.7 × 1.0 × 10  ≈  167 ions in active buffer</a:t>
+              <a:t>  B_sys (5 rows, 100ms dwell) = 50 chars/s</a:t>
             </a:r>
           </a:p>
           <a:p>
@@ -5976,7 +5810,16 @@
               <a:rPr lang="en-GB" sz="1300" dirty="0">
                 <a:latin typeface="Courier New"/>
               </a:rPr>
-              <a:t>  (Plus calcium metal source for continuous top-up)</a:t>
+              <a:t>  C_proto = 10 chars/refresh  →  R_r = 50/10 = 5.0 pairs/s</a:t>
+            </a:r>
+          </a:p>
+          <a:p>
+            <a:pPr algn="l"/>
+            <a:r>
+              <a:rPr lang="en-GB" sz="1300" dirty="0">
+                <a:latin typeface="Courier New"/>
+              </a:rPr>
+              <a:t>  5.0 &lt; 16.7  ←  NOT stable at 5 system rows</a:t>
             </a:r>
           </a:p>
           <a:p>
@@ -5993,7 +5836,7 @@
             </a:pPr>
             <a:r>
               <a:rPr lang="en-GB" sz="1700" b="1" dirty="0"/>
-              <a:t>Mission duration analysis - 1 year mission, 10,000-pair grid:</a:t>
+              <a:t>Required system rows:</a:t>
             </a:r>
           </a:p>
           <a:p>
@@ -6002,7 +5845,7 @@
               <a:rPr lang="en-GB" sz="1300" dirty="0">
                 <a:latin typeface="Courier New"/>
               </a:rPr>
-              <a:t>  Without bootstrap (pre-loaded pairs):</a:t>
+              <a:t>  N_sys_min = ceil(N_grid × C_proto × t_dwell / τ_c)</a:t>
             </a:r>
           </a:p>
           <a:p>
@@ -6011,7 +5854,7 @@
               <a:rPr lang="en-GB" sz="1300" dirty="0">
                 <a:latin typeface="Courier New"/>
               </a:rPr>
-              <a:t>    Ca⁺ electron spin (τ_c = 10 min):</a:t>
+              <a:t>  N_sys_min = ceil(10,000 × 10 × 0.1 / 600) = ceil(16.7) = 17 rows</a:t>
             </a:r>
           </a:p>
           <a:p>
@@ -6020,71 +5863,7 @@
               <a:rPr lang="en-GB" sz="1300" dirty="0">
                 <a:latin typeface="Courier New"/>
               </a:rPr>
-              <a:t>      N_reserve = 10,000 × 525,600 / 10 = 525,600,000 pairs</a:t>
-            </a:r>
-          </a:p>
-          <a:p>
-            <a:pPr algn="l"/>
-            <a:r>
-              <a:rPr lang="en-GB" sz="1300" dirty="0">
-                <a:latin typeface="Courier New"/>
-              </a:rPr>
-              <a:t>    Ca⁺ nuclear spin (τ_c = 10 hr):</a:t>
-            </a:r>
-          </a:p>
-          <a:p>
-            <a:pPr algn="l"/>
-            <a:r>
-              <a:rPr lang="en-GB" sz="1300" dirty="0">
-                <a:latin typeface="Courier New"/>
-              </a:rPr>
-              <a:t>      N_reserve = 10,000 × 8,760 / 10 = 8,760,000 pairs</a:t>
-            </a:r>
-          </a:p>
-          <a:p>
-            <a:pPr algn="l"/>
-            <a:endParaRPr lang="en-GB" sz="1300" dirty="0">
-              <a:latin typeface="Courier New"/>
-            </a:endParaRPr>
-          </a:p>
-          <a:p>
-            <a:pPr algn="l"/>
-            <a:r>
-              <a:rPr lang="en-GB" sz="1300" dirty="0">
-                <a:latin typeface="Courier New"/>
-              </a:rPr>
-              <a:t>  With bootstrap re-entanglement:</a:t>
-            </a:r>
-          </a:p>
-          <a:p>
-            <a:pPr algn="l"/>
-            <a:r>
-              <a:rPr lang="en-GB" sz="1300" dirty="0">
-                <a:latin typeface="Courier New"/>
-              </a:rPr>
-              <a:t>      N_reserve → ~167 ordinary ions in rolling buffer</a:t>
-            </a:r>
-          </a:p>
-          <a:p>
-            <a:pPr algn="l"/>
-            <a:r>
-              <a:rPr lang="en-GB" sz="1300" dirty="0">
-                <a:latin typeface="Courier New"/>
-              </a:rPr>
-              <a:t>      Plus ~1g calcium metal (abundant, non-toxic, cheap)</a:t>
-            </a:r>
-          </a:p>
-          <a:p>
-            <a:pPr algn="l"/>
-            <a:endParaRPr lang="en-GB" sz="1300" dirty="0">
-              <a:latin typeface="Courier New"/>
-            </a:endParaRPr>
-          </a:p>
-          <a:p>
-            <a:pPr algn="l"/>
-            <a:r>
-              <a:rPr lang="en-GB" sz="1600" dirty="0"/>
-              <a:t>Key result: with the seed bootstrap protocol and nuclear spin encoding, the ion reserve reduces from millions of pre-entangled pairs to a buffer of approximately 200 ordinary ions plus a calcium metal source.</a:t>
+              <a:t>  ∴ Reserve at least 17 system rows (17% of a 100-row grid)</a:t>
             </a:r>
           </a:p>
         </p:txBody>
@@ -6123,7 +5902,7 @@
         <p:spPr>
           <a:xfrm>
             <a:off x="0" y="0"/>
-            <a:ext cx="6858000" cy="800000"/>
+            <a:ext cx="6858000" cy="461665"/>
           </a:xfrm>
           <a:prstGeom prst="rect">
             <a:avLst/>
@@ -6139,7 +5918,7 @@
             <a:pPr algn="ctr"/>
             <a:r>
               <a:rPr lang="en-GB" sz="2400" dirty="0"/>
-              <a:t>Re-entanglement and the Speed of Light</a:t>
+              <a:t>Refresh Rate Mathematics - Extended Cases</a:t>
             </a:r>
           </a:p>
         </p:txBody>
@@ -6153,7 +5932,7 @@
         <p:spPr>
           <a:xfrm>
             <a:off x="150113" y="1000000"/>
-            <a:ext cx="6563531" cy="7176324"/>
+            <a:ext cx="6563531" cy="6432530"/>
           </a:xfrm>
           <a:prstGeom prst="rect">
             <a:avLst/>
@@ -6165,17 +5944,6 @@
             <a:spAutoFit/>
           </a:bodyPr>
           <a:lstStyle/>
-          <a:p>
-            <a:pPr algn="l"/>
-            <a:r>
-              <a:rPr lang="en-GB" sz="1600" dirty="0"/>
-              <a:t>The re-entanglement coordination signal travels on the EMT system channel. Its speed is the speed of the EMT channel itself. This creates a direct connection between two fundamental questions.</a:t>
-            </a:r>
-          </a:p>
-          <a:p>
-            <a:pPr algn="l"/>
-            <a:endParaRPr lang="en-GB" sz="1600" dirty="0"/>
-          </a:p>
           <a:p>
             <a:pPr algn="l">
               <a:spcBef>
@@ -6184,19 +5952,41 @@
             </a:pPr>
             <a:r>
               <a:rPr lang="en-GB" sz="1700" b="1" dirty="0"/>
-              <a:t>If EMT transmits information faster than light:</a:t>
-            </a:r>
-          </a:p>
-          <a:p>
-            <a:pPr lvl="1" algn="l"/>
-            <a:r>
-              <a:rPr lang="en-GB" sz="1600" dirty="0"/>
-              <a:t>The re-entanglement coordination also travels FTL. The bootstrap protocol works at any distance with no delay. The grid is truly self-sustaining at interstellar distances. Range is unlimited.</a:t>
-            </a:r>
-          </a:p>
-          <a:p>
-            <a:pPr algn="l"/>
-            <a:endParaRPr lang="en-GB" sz="1600" dirty="0"/>
+              <a:t>With Ca⁺ nuclear spin + DD (τ_c = 10 hours = 36,000 s):</a:t>
+            </a:r>
+          </a:p>
+          <a:p>
+            <a:pPr algn="l"/>
+            <a:r>
+              <a:rPr lang="en-GB" sz="1300" dirty="0">
+                <a:latin typeface="Courier New"/>
+              </a:rPr>
+              <a:t>  N_sys_min = ceil(10,000 × 10 × 0.1 / 36,000)</a:t>
+            </a:r>
+          </a:p>
+          <a:p>
+            <a:pPr algn="l"/>
+            <a:r>
+              <a:rPr lang="en-GB" sz="1300" dirty="0">
+                <a:latin typeface="Courier New"/>
+              </a:rPr>
+              <a:t>            = ceil(0.28)  =  1 row</a:t>
+            </a:r>
+          </a:p>
+          <a:p>
+            <a:pPr algn="l"/>
+            <a:r>
+              <a:rPr lang="en-GB" sz="1300" dirty="0">
+                <a:latin typeface="Courier New"/>
+              </a:rPr>
+              <a:t>  ∴ A SINGLE system row maintains 10,000 pairs indefinitely.</a:t>
+            </a:r>
+          </a:p>
+          <a:p>
+            <a:pPr algn="l"/>
+            <a:endParaRPr lang="en-GB" sz="1300" dirty="0">
+              <a:latin typeface="Courier New"/>
+            </a:endParaRPr>
           </a:p>
           <a:p>
             <a:pPr algn="l">
@@ -6206,19 +5996,32 @@
             </a:pPr>
             <a:r>
               <a:rPr lang="en-GB" sz="1700" b="1" dirty="0"/>
-              <a:t>If EMT does not transmit information faster than light:</a:t>
-            </a:r>
-          </a:p>
-          <a:p>
-            <a:pPr lvl="1" algn="l"/>
-            <a:r>
-              <a:rPr lang="en-GB" sz="1600" dirty="0"/>
-              <a:t>Coordination is light-speed limited. Re-entanglement at distance D takes a minimum D/c round-trip time. The grid self-sustains within the coherence-limited range.</a:t>
-            </a:r>
-          </a:p>
-          <a:p>
-            <a:pPr algn="l"/>
-            <a:endParaRPr lang="en-GB" sz="1600" dirty="0"/>
+              <a:t>General formula:</a:t>
+            </a:r>
+          </a:p>
+          <a:p>
+            <a:pPr algn="l"/>
+            <a:r>
+              <a:rPr lang="en-GB" sz="1300" dirty="0">
+                <a:latin typeface="Courier New"/>
+              </a:rPr>
+              <a:t>  f_sys = N_sys / N_total = C_proto × t_dwell / τ_c</a:t>
+            </a:r>
+          </a:p>
+          <a:p>
+            <a:pPr algn="l"/>
+            <a:r>
+              <a:rPr lang="en-GB" sz="1300" dirty="0">
+                <a:latin typeface="Courier New"/>
+              </a:rPr>
+              <a:t>  As τ_c increases, the system channel overhead tends toward zero.</a:t>
+            </a:r>
+          </a:p>
+          <a:p>
+            <a:pPr algn="l"/>
+            <a:endParaRPr lang="en-GB" sz="1300" dirty="0">
+              <a:latin typeface="Courier New"/>
+            </a:endParaRPr>
           </a:p>
           <a:p>
             <a:pPr algn="l">
@@ -6228,7 +6031,7 @@
             </a:pPr>
             <a:r>
               <a:rPr lang="en-GB" sz="1700" b="1" dirty="0"/>
-              <a:t>Practical range without FTL - Ca⁺ nuclear spin (τ_c = 10 hours):</a:t>
+              <a:t>Ion reserve buffer size (with bootstrap, not pre-loaded):</a:t>
             </a:r>
           </a:p>
           <a:p>
@@ -6237,7 +6040,7 @@
               <a:rPr lang="en-GB" sz="1300" dirty="0">
                 <a:latin typeface="Courier New"/>
               </a:rPr>
-              <a:t>  Max coordination round-trip  &lt;  τ_c  =  36,000 s</a:t>
+              <a:t>  N_buffer = R_d × t_refresh × safety_factor</a:t>
             </a:r>
           </a:p>
           <a:p>
@@ -6246,7 +6049,7 @@
               <a:rPr lang="en-GB" sz="1300" dirty="0">
                 <a:latin typeface="Courier New"/>
               </a:rPr>
-              <a:t>  Max distance = c × τ_c / 2</a:t>
+              <a:t>           = 16.7 × 1.0 × 10  ≈  167 ions in active buffer</a:t>
             </a:r>
           </a:p>
           <a:p>
@@ -6255,25 +6058,7 @@
               <a:rPr lang="en-GB" sz="1300" dirty="0">
                 <a:latin typeface="Courier New"/>
               </a:rPr>
-              <a:t>               = 3×10⁸ m/s × 36,000 s / 2</a:t>
-            </a:r>
-          </a:p>
-          <a:p>
-            <a:pPr algn="l"/>
-            <a:r>
-              <a:rPr lang="en-GB" sz="1300" dirty="0">
-                <a:latin typeface="Courier New"/>
-              </a:rPr>
-              <a:t>               = 5.4 × 10¹² m  =  36 AU  (Saturn orbit)</a:t>
-            </a:r>
-          </a:p>
-          <a:p>
-            <a:pPr algn="l"/>
-            <a:r>
-              <a:rPr lang="en-GB" sz="1300" dirty="0">
-                <a:latin typeface="Courier New"/>
-              </a:rPr>
-              <a:t>  Without FTL, EMT covers the entire inner solar system seamlessly.</a:t>
+              <a:t>  (Plus calcium metal source for continuous top-up)</a:t>
             </a:r>
           </a:p>
           <a:p>
@@ -6290,14 +6075,98 @@
             </a:pPr>
             <a:r>
               <a:rPr lang="en-GB" sz="1700" b="1" dirty="0"/>
-              <a:t>The two questions resolve together:</a:t>
-            </a:r>
-          </a:p>
-          <a:p>
-            <a:pPr algn="l"/>
-            <a:r>
-              <a:rPr lang="en-GB" sz="1600" dirty="0"/>
-              <a:t>A self-maintaining grid at Jupiter distance simultaneously confirms FTL signalling and demonstrates indefinite range operation. A grid that fails to self-maintain beyond Saturn confirms the no-communication theorem. Either result is a significant scientific outcome. Either result, the device already covers Earth to Jupiter - a transformative capability for deep space communication.</a:t>
+              <a:t>Mission duration analysis - 1 year mission, 10,000-pair grid:</a:t>
+            </a:r>
+          </a:p>
+          <a:p>
+            <a:pPr algn="l"/>
+            <a:r>
+              <a:rPr lang="en-GB" sz="1300" dirty="0">
+                <a:latin typeface="Courier New"/>
+              </a:rPr>
+              <a:t>  Without bootstrap (pre-loaded pairs):</a:t>
+            </a:r>
+          </a:p>
+          <a:p>
+            <a:pPr algn="l"/>
+            <a:r>
+              <a:rPr lang="en-GB" sz="1300" dirty="0">
+                <a:latin typeface="Courier New"/>
+              </a:rPr>
+              <a:t>    Ca⁺ electron spin (τ_c = 10 min):</a:t>
+            </a:r>
+          </a:p>
+          <a:p>
+            <a:pPr algn="l"/>
+            <a:r>
+              <a:rPr lang="en-GB" sz="1300" dirty="0">
+                <a:latin typeface="Courier New"/>
+              </a:rPr>
+              <a:t>      N_reserve = 10,000 × 525,600 / 10 = 525,600,000 pairs</a:t>
+            </a:r>
+          </a:p>
+          <a:p>
+            <a:pPr algn="l"/>
+            <a:r>
+              <a:rPr lang="en-GB" sz="1300" dirty="0">
+                <a:latin typeface="Courier New"/>
+              </a:rPr>
+              <a:t>    Ca⁺ nuclear spin (τ_c = 10 hr):</a:t>
+            </a:r>
+          </a:p>
+          <a:p>
+            <a:pPr algn="l"/>
+            <a:r>
+              <a:rPr lang="en-GB" sz="1300" dirty="0">
+                <a:latin typeface="Courier New"/>
+              </a:rPr>
+              <a:t>      N_reserve = 10,000 × 8,760 / 10 = 8,760,000 pairs</a:t>
+            </a:r>
+          </a:p>
+          <a:p>
+            <a:pPr algn="l"/>
+            <a:endParaRPr lang="en-GB" sz="1300" dirty="0">
+              <a:latin typeface="Courier New"/>
+            </a:endParaRPr>
+          </a:p>
+          <a:p>
+            <a:pPr algn="l"/>
+            <a:r>
+              <a:rPr lang="en-GB" sz="1300" dirty="0">
+                <a:latin typeface="Courier New"/>
+              </a:rPr>
+              <a:t>  With bootstrap re-entanglement:</a:t>
+            </a:r>
+          </a:p>
+          <a:p>
+            <a:pPr algn="l"/>
+            <a:r>
+              <a:rPr lang="en-GB" sz="1300" dirty="0">
+                <a:latin typeface="Courier New"/>
+              </a:rPr>
+              <a:t>      N_reserve → ~167 ordinary ions in rolling buffer</a:t>
+            </a:r>
+          </a:p>
+          <a:p>
+            <a:pPr algn="l"/>
+            <a:r>
+              <a:rPr lang="en-GB" sz="1300" dirty="0">
+                <a:latin typeface="Courier New"/>
+              </a:rPr>
+              <a:t>      Plus ~1g calcium metal (abundant, non-toxic, cheap)</a:t>
+            </a:r>
+          </a:p>
+          <a:p>
+            <a:pPr algn="l"/>
+            <a:endParaRPr lang="en-GB" sz="1300" dirty="0">
+              <a:latin typeface="Courier New"/>
+            </a:endParaRPr>
+          </a:p>
+          <a:p>
+            <a:pPr algn="l"/>
+            <a:r>
+              <a:rPr lang="en-GB" sz="1600" dirty="0"/>
+              <a:t>Key result: with the seed bootstrap protocol and nuclear spin encoding, the ion reserve reduces from millions of pre-entangled pairs to a buffer of approximately 200 ordinary ions plus a calcium metal source.</a:t>
             </a:r>
           </a:p>
         </p:txBody>
@@ -6336,7 +6205,7 @@
         <p:spPr>
           <a:xfrm>
             <a:off x="0" y="0"/>
-            <a:ext cx="6858000" cy="461665"/>
+            <a:ext cx="6858000" cy="800000"/>
           </a:xfrm>
           <a:prstGeom prst="rect">
             <a:avLst/>
@@ -6352,7 +6221,7 @@
             <a:pPr algn="ctr"/>
             <a:r>
               <a:rPr lang="en-GB" sz="2400" dirty="0"/>
-              <a:t>Total Decoherence - The Worst Case</a:t>
+              <a:t>Re-entanglement and the Speed of Light</a:t>
             </a:r>
           </a:p>
         </p:txBody>
@@ -6365,8 +6234,8 @@
         </p:nvSpPr>
         <p:spPr>
           <a:xfrm>
-            <a:off x="150187" y="671901"/>
-            <a:ext cx="6563531" cy="7066037"/>
+            <a:off x="150113" y="1000000"/>
+            <a:ext cx="6563531" cy="7176324"/>
           </a:xfrm>
           <a:prstGeom prst="rect">
             <a:avLst/>
@@ -6382,64 +6251,7 @@
             <a:pPr algn="l"/>
             <a:r>
               <a:rPr lang="en-GB" sz="1600" dirty="0"/>
-              <a:t>The self-healing bootstrap protocol keeps the EMT grid alive indefinitely as long as at least one entangled pair survives and the calcium reserve is non-empty. However a catastrophic failure - extreme radiation, power loss, physical damage - could decohere the entire grid simultaneously.</a:t>
-            </a:r>
-          </a:p>
-          <a:p>
-            <a:pPr algn="l"/>
-            <a:endParaRPr lang="en-GB" sz="1600" dirty="0"/>
-          </a:p>
-          <a:p>
-            <a:pPr algn="l"/>
-            <a:r>
-              <a:rPr lang="en-GB" sz="1600" dirty="0"/>
-              <a:t>In this scenario, by assumption:</a:t>
-            </a:r>
-          </a:p>
-          <a:p>
-            <a:pPr lvl="1" algn="l"/>
-            <a:r>
-              <a:rPr lang="en-GB" sz="1600" dirty="0"/>
-              <a:t>All entangled ion pairs are lost.</a:t>
-            </a:r>
-          </a:p>
-          <a:p>
-            <a:pPr lvl="1" algn="l"/>
-            <a:r>
-              <a:rPr lang="en-GB" sz="1600" dirty="0"/>
-              <a:t>The calcium reserve contains only ordinary unentangled Ca⁺ ions.</a:t>
-            </a:r>
-          </a:p>
-          <a:p>
-            <a:pPr lvl="1" algn="l"/>
-            <a:r>
-              <a:rPr lang="en-GB" sz="1600" dirty="0"/>
-              <a:t>No EMT channel exists - no system channel, no user channel.</a:t>
-            </a:r>
-          </a:p>
-          <a:p>
-            <a:pPr lvl="1" algn="l"/>
-            <a:r>
-              <a:rPr lang="en-GB" sz="1600" dirty="0"/>
-              <a:t>No classical communication channel is available.</a:t>
-            </a:r>
-          </a:p>
-          <a:p>
-            <a:pPr lvl="1" algn="l"/>
-            <a:r>
-              <a:rPr lang="en-GB" sz="1600" dirty="0"/>
-              <a:t>No photon link of any kind can be established.</a:t>
-            </a:r>
-          </a:p>
-          <a:p>
-            <a:pPr algn="l"/>
-            <a:endParaRPr lang="en-GB" sz="1600" dirty="0"/>
-          </a:p>
-          <a:p>
-            <a:pPr algn="l"/>
-            <a:r>
-              <a:rPr lang="en-GB" sz="1600" dirty="0"/>
-              <a:t>The standard Delft re-entanglement method is impossible: it requires both a photon link and a classical channel to broadcast the Bell measurement result. Neither is available.</a:t>
+              <a:t>The re-entanglement coordination signal travels on the EMT system channel. Its speed is the speed of the EMT channel itself. This creates a direct connection between two fundamental questions.</a:t>
             </a:r>
           </a:p>
           <a:p>
@@ -6449,19 +6261,19 @@
           <a:p>
             <a:pPr algn="l">
               <a:spcBef>
-                <a:spcPts val="500"/>
+                <a:spcPts val="400"/>
               </a:spcBef>
             </a:pPr>
             <a:r>
               <a:rPr lang="en-GB" sz="1700" b="1" dirty="0"/>
-              <a:t>The honest physics position:</a:t>
-            </a:r>
-          </a:p>
-          <a:p>
-            <a:pPr algn="l"/>
-            <a:r>
-              <a:rPr lang="en-GB" sz="1600" dirty="0"/>
-              <a:t>Within known quantum mechanics, entanglement cannot be created between two separated systems with no physical connection between them. This is not an engineering limit. It is a structural consequence of quantum mechanics itself - two systems with no shared history cannot occupy a joint quantum state.</a:t>
+              <a:t>If EMT transmits information faster than light:</a:t>
+            </a:r>
+          </a:p>
+          <a:p>
+            <a:pPr lvl="1" algn="l"/>
+            <a:r>
+              <a:rPr lang="en-GB" sz="1600" dirty="0"/>
+              <a:t>The re-entanglement coordination also travels FTL. The bootstrap protocol works at any distance with no delay. The grid is truly self-sustaining at interstellar distances. Range is unlimited.</a:t>
             </a:r>
           </a:p>
           <a:p>
@@ -6469,10 +6281,105 @@
             <a:endParaRPr lang="en-GB" sz="1600" dirty="0"/>
           </a:p>
           <a:p>
-            <a:pPr algn="l"/>
-            <a:r>
-              <a:rPr lang="en-GB" sz="1600" dirty="0"/>
-              <a:t>However, the EMT hypothesis already operates in a regime where the standard formalism may be incomplete. The same open question that asks whether EMT can transmit information also asks whether the deeper non-local structure it implies could support re-entanglement without a physical link. These are not two questions. They are one.</a:t>
+            <a:pPr algn="l">
+              <a:spcBef>
+                <a:spcPts val="400"/>
+              </a:spcBef>
+            </a:pPr>
+            <a:r>
+              <a:rPr lang="en-GB" sz="1700" b="1" dirty="0"/>
+              <a:t>If EMT does not transmit information faster than light:</a:t>
+            </a:r>
+          </a:p>
+          <a:p>
+            <a:pPr lvl="1" algn="l"/>
+            <a:r>
+              <a:rPr lang="en-GB" sz="1600" dirty="0"/>
+              <a:t>Coordination is light-speed limited. Re-entanglement at distance D takes a minimum D/c round-trip time. The grid self-sustains within the coherence-limited range.</a:t>
+            </a:r>
+          </a:p>
+          <a:p>
+            <a:pPr algn="l"/>
+            <a:endParaRPr lang="en-GB" sz="1600" dirty="0"/>
+          </a:p>
+          <a:p>
+            <a:pPr algn="l">
+              <a:spcBef>
+                <a:spcPts val="400"/>
+              </a:spcBef>
+            </a:pPr>
+            <a:r>
+              <a:rPr lang="en-GB" sz="1700" b="1" dirty="0"/>
+              <a:t>Practical range without FTL - Ca⁺ nuclear spin (τ_c = 10 hours):</a:t>
+            </a:r>
+          </a:p>
+          <a:p>
+            <a:pPr algn="l"/>
+            <a:r>
+              <a:rPr lang="en-GB" sz="1300" dirty="0">
+                <a:latin typeface="Courier New"/>
+              </a:rPr>
+              <a:t>  Max coordination round-trip  &lt;  τ_c  =  36,000 s</a:t>
+            </a:r>
+          </a:p>
+          <a:p>
+            <a:pPr algn="l"/>
+            <a:r>
+              <a:rPr lang="en-GB" sz="1300" dirty="0">
+                <a:latin typeface="Courier New"/>
+              </a:rPr>
+              <a:t>  Max distance = c × τ_c / 2</a:t>
+            </a:r>
+          </a:p>
+          <a:p>
+            <a:pPr algn="l"/>
+            <a:r>
+              <a:rPr lang="en-GB" sz="1300" dirty="0">
+                <a:latin typeface="Courier New"/>
+              </a:rPr>
+              <a:t>               = 3×10⁸ m/s × 36,000 s / 2</a:t>
+            </a:r>
+          </a:p>
+          <a:p>
+            <a:pPr algn="l"/>
+            <a:r>
+              <a:rPr lang="en-GB" sz="1300" dirty="0">
+                <a:latin typeface="Courier New"/>
+              </a:rPr>
+              <a:t>               = 5.4 × 10¹² m  =  36 AU  (Saturn orbit)</a:t>
+            </a:r>
+          </a:p>
+          <a:p>
+            <a:pPr algn="l"/>
+            <a:r>
+              <a:rPr lang="en-GB" sz="1300" dirty="0">
+                <a:latin typeface="Courier New"/>
+              </a:rPr>
+              <a:t>  Without FTL, EMT covers the entire inner solar system seamlessly.</a:t>
+            </a:r>
+          </a:p>
+          <a:p>
+            <a:pPr algn="l"/>
+            <a:endParaRPr lang="en-GB" sz="1300" dirty="0">
+              <a:latin typeface="Courier New"/>
+            </a:endParaRPr>
+          </a:p>
+          <a:p>
+            <a:pPr algn="l">
+              <a:spcBef>
+                <a:spcPts val="400"/>
+              </a:spcBef>
+            </a:pPr>
+            <a:r>
+              <a:rPr lang="en-GB" sz="1700" b="1" dirty="0"/>
+              <a:t>The two questions resolve together:</a:t>
+            </a:r>
+          </a:p>
+          <a:p>
+            <a:pPr algn="l"/>
+            <a:r>
+              <a:rPr lang="en-GB" sz="1600" dirty="0"/>
+              <a:t>A self-maintaining grid at Jupiter distance simultaneously confirms FTL signalling and demonstrates indefinite range operation. A grid that fails to self-maintain beyond Saturn confirms the no-communication theorem. Either result is a significant scientific outcome. Either result, the device already covers Earth to Jupiter - a transformative capability for deep space communication.</a:t>
             </a:r>
           </a:p>
         </p:txBody>
@@ -6511,7 +6418,7 @@
         <p:spPr>
           <a:xfrm>
             <a:off x="0" y="0"/>
-            <a:ext cx="6858000" cy="400110"/>
+            <a:ext cx="6858000" cy="461665"/>
           </a:xfrm>
           <a:prstGeom prst="rect">
             <a:avLst/>
@@ -6526,8 +6433,8 @@
           <a:p>
             <a:pPr algn="ctr"/>
             <a:r>
-              <a:rPr lang="en-GB" sz="2000" dirty="0"/>
-              <a:t>Retroactive Causality - What Quantum Mechanics Shows</a:t>
+              <a:rPr lang="en-GB" sz="2400" dirty="0"/>
+              <a:t>Total Decoherence - The Worst Case</a:t>
             </a:r>
           </a:p>
         </p:txBody>
@@ -6541,7 +6448,7 @@
         <p:spPr>
           <a:xfrm>
             <a:off x="150187" y="671901"/>
-            <a:ext cx="6563531" cy="7145546"/>
+            <a:ext cx="6563531" cy="7066037"/>
           </a:xfrm>
           <a:prstGeom prst="rect">
             <a:avLst/>
@@ -6557,7 +6464,64 @@
             <a:pPr algn="l"/>
             <a:r>
               <a:rPr lang="en-GB" sz="1600" dirty="0"/>
-              <a:t>Retroactive causality is not science fiction. It is experimentally confirmed in quantum mechanics. The key result is the delayed-choice entanglement swapping experiment (Ma et al., 2012).</a:t>
+              <a:t>The self-healing bootstrap protocol keeps the EMT grid alive indefinitely as long as at least one entangled pair survives and the calcium reserve is non-empty. However a catastrophic failure - extreme radiation, power loss, physical damage - could decohere the entire grid simultaneously.</a:t>
+            </a:r>
+          </a:p>
+          <a:p>
+            <a:pPr algn="l"/>
+            <a:endParaRPr lang="en-GB" sz="1600" dirty="0"/>
+          </a:p>
+          <a:p>
+            <a:pPr algn="l"/>
+            <a:r>
+              <a:rPr lang="en-GB" sz="1600" dirty="0"/>
+              <a:t>In this scenario, by assumption:</a:t>
+            </a:r>
+          </a:p>
+          <a:p>
+            <a:pPr lvl="1" algn="l"/>
+            <a:r>
+              <a:rPr lang="en-GB" sz="1600" dirty="0"/>
+              <a:t>All entangled ion pairs are lost.</a:t>
+            </a:r>
+          </a:p>
+          <a:p>
+            <a:pPr lvl="1" algn="l"/>
+            <a:r>
+              <a:rPr lang="en-GB" sz="1600" dirty="0"/>
+              <a:t>The calcium reserve contains only ordinary unentangled Ca⁺ ions.</a:t>
+            </a:r>
+          </a:p>
+          <a:p>
+            <a:pPr lvl="1" algn="l"/>
+            <a:r>
+              <a:rPr lang="en-GB" sz="1600" dirty="0"/>
+              <a:t>No EMT channel exists - no system channel, no user channel.</a:t>
+            </a:r>
+          </a:p>
+          <a:p>
+            <a:pPr lvl="1" algn="l"/>
+            <a:r>
+              <a:rPr lang="en-GB" sz="1600" dirty="0"/>
+              <a:t>No classical communication channel is available.</a:t>
+            </a:r>
+          </a:p>
+          <a:p>
+            <a:pPr lvl="1" algn="l"/>
+            <a:r>
+              <a:rPr lang="en-GB" sz="1600" dirty="0"/>
+              <a:t>No photon link of any kind can be established.</a:t>
+            </a:r>
+          </a:p>
+          <a:p>
+            <a:pPr algn="l"/>
+            <a:endParaRPr lang="en-GB" sz="1600" dirty="0"/>
+          </a:p>
+          <a:p>
+            <a:pPr algn="l"/>
+            <a:r>
+              <a:rPr lang="en-GB" sz="1600" dirty="0"/>
+              <a:t>The standard Delft re-entanglement method is impossible: it requires both a photon link and a classical channel to broadcast the Bell measurement result. Neither is available.</a:t>
             </a:r>
           </a:p>
           <a:p>
@@ -6572,42 +6536,14 @@
             </a:pPr>
             <a:r>
               <a:rPr lang="en-GB" sz="1700" b="1" dirty="0"/>
-              <a:t>The delayed-choice result:</a:t>
-            </a:r>
-          </a:p>
-          <a:p>
-            <a:pPr lvl="1" algn="l"/>
-            <a:r>
-              <a:rPr lang="en-GB" sz="1600" dirty="0"/>
-              <a:t>Source 1 produces entangled pair: photons 1 and 2.</a:t>
-            </a:r>
-          </a:p>
-          <a:p>
-            <a:pPr lvl="1" algn="l"/>
-            <a:r>
-              <a:rPr lang="en-GB" sz="1600" dirty="0"/>
-              <a:t>Source 2 produces entangled pair: photons 3 and 4.</a:t>
-            </a:r>
-          </a:p>
-          <a:p>
-            <a:pPr lvl="1" algn="l"/>
-            <a:r>
-              <a:rPr lang="en-GB" sz="1600" dirty="0"/>
-              <a:t>Photons 1 and 4 are sent to Alice and Bob. Measured. Results recorded.</a:t>
-            </a:r>
-          </a:p>
-          <a:p>
-            <a:pPr lvl="1" algn="l"/>
-            <a:r>
-              <a:rPr lang="en-GB" sz="1600" dirty="0"/>
-              <a:t>Photons 2 and 3 are sent to Victor.</a:t>
-            </a:r>
-          </a:p>
-          <a:p>
-            <a:pPr lvl="1" algn="l"/>
-            <a:r>
-              <a:rPr lang="en-GB" sz="1600" dirty="0"/>
-              <a:t>Victor later decides: perform a Bell measurement on 2 and 3, or not.</a:t>
+              <a:t>The honest physics position:</a:t>
+            </a:r>
+          </a:p>
+          <a:p>
+            <a:pPr algn="l"/>
+            <a:r>
+              <a:rPr lang="en-GB" sz="1600" dirty="0"/>
+              <a:t>Within known quantum mechanics, entanglement cannot be created between two separated systems with no physical connection between them. This is not an engineering limit. It is a structural consequence of quantum mechanics itself - two systems with no shared history cannot occupy a joint quantum state.</a:t>
             </a:r>
           </a:p>
           <a:p>
@@ -6615,61 +6551,10 @@
             <a:endParaRPr lang="en-GB" sz="1600" dirty="0"/>
           </a:p>
           <a:p>
-            <a:pPr lvl="1" algn="l"/>
-            <a:r>
-              <a:rPr lang="en-GB" sz="1600" dirty="0"/>
-              <a:t>If Victor performs the Bell measurement: Alice and Bob's already-recorded results show entanglement correlations - retroactively.</a:t>
-            </a:r>
-          </a:p>
-          <a:p>
-            <a:pPr lvl="1" algn="l"/>
-            <a:r>
-              <a:rPr lang="en-GB" sz="1600" dirty="0"/>
-              <a:t>If Victor does not: Alice and Bob's results show no correlations.</a:t>
-            </a:r>
-          </a:p>
-          <a:p>
-            <a:pPr algn="l"/>
-            <a:endParaRPr lang="en-GB" sz="1600" dirty="0"/>
-          </a:p>
-          <a:p>
-            <a:pPr algn="l"/>
-            <a:r>
-              <a:rPr lang="en-GB" sz="1600" dirty="0"/>
-              <a:t>Victor's decision, made after Alice and Bob have finished measuring, determines whether their particles were entangled. The causal arrow does not point the way classical physics expects.</a:t>
-            </a:r>
-          </a:p>
-          <a:p>
-            <a:pPr algn="l"/>
-            <a:endParaRPr lang="en-GB" sz="1600" dirty="0"/>
-          </a:p>
-          <a:p>
-            <a:pPr algn="l">
-              <a:spcBef>
-                <a:spcPts val="500"/>
-              </a:spcBef>
-            </a:pPr>
-            <a:r>
-              <a:rPr lang="en-GB" sz="1700" b="1" dirty="0"/>
-              <a:t>What this means:</a:t>
-            </a:r>
-          </a:p>
-          <a:p>
-            <a:pPr algn="l"/>
-            <a:r>
-              <a:rPr lang="en-GB" sz="1600" dirty="0"/>
-              <a:t>Entanglement is not simply established at the moment of physical interaction and then passively maintained. It can be established retroactively by a measurement that occurs after the entangled particles have already been detected. The joint quantum state is not fully determined until the complete measurement context is fixed.</a:t>
-            </a:r>
-          </a:p>
-          <a:p>
-            <a:pPr algn="l"/>
-            <a:endParaRPr lang="en-GB" sz="1600" dirty="0"/>
-          </a:p>
-          <a:p>
-            <a:pPr algn="l"/>
-            <a:r>
-              <a:rPr lang="en-GB" sz="1600" dirty="0"/>
-              <a:t>This is the foundation for the pairing code recovery protocol.</a:t>
+            <a:pPr algn="l"/>
+            <a:r>
+              <a:rPr lang="en-GB" sz="1600" dirty="0"/>
+              <a:t>However, the EMT hypothesis already operates in a regime where the standard formalism may be incomplete. The same open question that asks whether EMT can transmit information also asks whether the deeper non-local structure it implies could support re-entanglement without a physical link. These are not two questions. They are one.</a:t>
             </a:r>
           </a:p>
         </p:txBody>
@@ -6708,7 +6593,7 @@
         <p:spPr>
           <a:xfrm>
             <a:off x="0" y="0"/>
-            <a:ext cx="6858000" cy="523719"/>
+            <a:ext cx="6858000" cy="400110"/>
           </a:xfrm>
           <a:prstGeom prst="rect">
             <a:avLst/>
@@ -6723,8 +6608,8 @@
           <a:p>
             <a:pPr algn="ctr"/>
             <a:r>
-              <a:rPr lang="en-GB" sz="3556" dirty="0"/>
-              <a:t>The Virtual Bell Measurement</a:t>
+              <a:rPr lang="en-GB" sz="2000" dirty="0"/>
+              <a:t>Retroactive Causality - What Quantum Mechanics Shows</a:t>
             </a:r>
           </a:p>
         </p:txBody>
@@ -6738,7 +6623,7 @@
         <p:spPr>
           <a:xfrm>
             <a:off x="150187" y="671901"/>
-            <a:ext cx="6563531" cy="8209940"/>
+            <a:ext cx="6563531" cy="7145546"/>
           </a:xfrm>
           <a:prstGeom prst="rect">
             <a:avLst/>
@@ -6754,18 +6639,7 @@
             <a:pPr algn="l"/>
             <a:r>
               <a:rPr lang="en-GB" sz="1600" dirty="0"/>
-              <a:t>In the delayed-choice experiment, Victor performs a real Bell measurement on real photons. The retroactivity comes from the timing. The physical intermediary exists.</a:t>
-            </a:r>
-          </a:p>
-          <a:p>
-            <a:pPr algn="l"/>
-            <a:endParaRPr lang="en-GB" sz="1600" dirty="0"/>
-          </a:p>
-          <a:p>
-            <a:pPr algn="l"/>
-            <a:r>
-              <a:rPr lang="en-GB" sz="1600" dirty="0"/>
-              <a:t>The pairing code protocol asks whether the physical intermediary is strictly necessary, or whether two devices performing the correct local operations - independently, with no connection - can produce the same result.</a:t>
+              <a:t>Retroactive causality is not science fiction. It is experimentally confirmed in quantum mechanics. The key result is the delayed-choice entanglement swapping experiment (Ma et al., 2012).</a:t>
             </a:r>
           </a:p>
           <a:p>
@@ -6780,14 +6654,71 @@
             </a:pPr>
             <a:r>
               <a:rPr lang="en-GB" sz="1700" b="1" dirty="0"/>
-              <a:t>What a Bell measurement does mathematically:</a:t>
-            </a:r>
-          </a:p>
-          <a:p>
-            <a:pPr algn="l"/>
-            <a:r>
-              <a:rPr lang="en-GB" sz="1600" dirty="0"/>
-              <a:t>It projects a joint system into one of four Bell states. It transforms the joint Hilbert space. Each of the four outcomes corresponds to a specific correction operation that one party must apply to recover a target entangled state.</a:t>
+              <a:t>The delayed-choice result:</a:t>
+            </a:r>
+          </a:p>
+          <a:p>
+            <a:pPr lvl="1" algn="l"/>
+            <a:r>
+              <a:rPr lang="en-GB" sz="1600" dirty="0"/>
+              <a:t>Source 1 produces entangled pair: photons 1 and 2.</a:t>
+            </a:r>
+          </a:p>
+          <a:p>
+            <a:pPr lvl="1" algn="l"/>
+            <a:r>
+              <a:rPr lang="en-GB" sz="1600" dirty="0"/>
+              <a:t>Source 2 produces entangled pair: photons 3 and 4.</a:t>
+            </a:r>
+          </a:p>
+          <a:p>
+            <a:pPr lvl="1" algn="l"/>
+            <a:r>
+              <a:rPr lang="en-GB" sz="1600" dirty="0"/>
+              <a:t>Photons 1 and 4 are sent to Alice and Bob. Measured. Results recorded.</a:t>
+            </a:r>
+          </a:p>
+          <a:p>
+            <a:pPr lvl="1" algn="l"/>
+            <a:r>
+              <a:rPr lang="en-GB" sz="1600" dirty="0"/>
+              <a:t>Photons 2 and 3 are sent to Victor.</a:t>
+            </a:r>
+          </a:p>
+          <a:p>
+            <a:pPr lvl="1" algn="l"/>
+            <a:r>
+              <a:rPr lang="en-GB" sz="1600" dirty="0"/>
+              <a:t>Victor later decides: perform a Bell measurement on 2 and 3, or not.</a:t>
+            </a:r>
+          </a:p>
+          <a:p>
+            <a:pPr algn="l"/>
+            <a:endParaRPr lang="en-GB" sz="1600" dirty="0"/>
+          </a:p>
+          <a:p>
+            <a:pPr lvl="1" algn="l"/>
+            <a:r>
+              <a:rPr lang="en-GB" sz="1600" dirty="0"/>
+              <a:t>If Victor performs the Bell measurement: Alice and Bob's already-recorded results show entanglement correlations - retroactively.</a:t>
+            </a:r>
+          </a:p>
+          <a:p>
+            <a:pPr lvl="1" algn="l"/>
+            <a:r>
+              <a:rPr lang="en-GB" sz="1600" dirty="0"/>
+              <a:t>If Victor does not: Alice and Bob's results show no correlations.</a:t>
+            </a:r>
+          </a:p>
+          <a:p>
+            <a:pPr algn="l"/>
+            <a:endParaRPr lang="en-GB" sz="1600" dirty="0"/>
+          </a:p>
+          <a:p>
+            <a:pPr algn="l"/>
+            <a:r>
+              <a:rPr lang="en-GB" sz="1600" dirty="0"/>
+              <a:t>Victor's decision, made after Alice and Bob have finished measuring, determines whether their particles were entangled. The causal arrow does not point the way classical physics expects.</a:t>
             </a:r>
           </a:p>
           <a:p>
@@ -6802,35 +6733,14 @@
             </a:pPr>
             <a:r>
               <a:rPr lang="en-GB" sz="1700" b="1" dirty="0"/>
-              <a:t>The virtual Bell measurement:</a:t>
-            </a:r>
-          </a:p>
-          <a:p>
-            <a:pPr lvl="1" algn="l"/>
-            <a:r>
-              <a:rPr lang="en-GB" sz="1600" dirty="0"/>
-              <a:t>Device A prepares its fresh Ca⁺ ions to state α - specified exactly by the pairing code.</a:t>
-            </a:r>
-          </a:p>
-          <a:p>
-            <a:pPr lvl="1" algn="l"/>
-            <a:r>
-              <a:rPr lang="en-GB" sz="1600" dirty="0"/>
-              <a:t>Device B prepares its fresh Ca⁺ ions to state β - specified exactly by the pairing code.</a:t>
-            </a:r>
-          </a:p>
-          <a:p>
-            <a:pPr lvl="1" algn="l"/>
-            <a:r>
-              <a:rPr lang="en-GB" sz="1600" dirty="0"/>
-              <a:t>Both devices independently perform the local unitary operations that constitute their half of a Bell measurement on a virtual joint system - as if a physical intermediary existed between them.</a:t>
-            </a:r>
-          </a:p>
-          <a:p>
-            <a:pPr lvl="1" algn="l"/>
-            <a:r>
-              <a:rPr lang="en-GB" sz="1600" dirty="0"/>
-              <a:t>No intermediary exists. No photons are exchanged. No classical message is sent. Each device only acts on its own ions.</a:t>
+              <a:t>What this means:</a:t>
+            </a:r>
+          </a:p>
+          <a:p>
+            <a:pPr algn="l"/>
+            <a:r>
+              <a:rPr lang="en-GB" sz="1600" dirty="0"/>
+              <a:t>Entanglement is not simply established at the moment of physical interaction and then passively maintained. It can be established retroactively by a measurement that occurs after the entangled particles have already been detected. The joint quantum state is not fully determined until the complete measurement context is fixed.</a:t>
             </a:r>
           </a:p>
           <a:p>
@@ -6838,21 +6748,10 @@
             <a:endParaRPr lang="en-GB" sz="1600" dirty="0"/>
           </a:p>
           <a:p>
-            <a:pPr algn="l">
-              <a:spcBef>
-                <a:spcPts val="500"/>
-              </a:spcBef>
-            </a:pPr>
-            <a:r>
-              <a:rPr lang="en-GB" sz="1700" b="1" dirty="0"/>
-              <a:t>The open question:</a:t>
-            </a:r>
-          </a:p>
-          <a:p>
-            <a:pPr algn="l"/>
-            <a:r>
-              <a:rPr lang="en-GB" sz="1600" dirty="0"/>
-              <a:t>Is the physical existence of the intermediary mandatory, or is the mathematical equivalence of the operations sufficient? Standard QM says mandatory. The EMT hypothesis implies there may be a deeper non-local structure in which mathematical equivalence is sufficient. Both questions are decided by the same experiment.</a:t>
+            <a:pPr algn="l"/>
+            <a:r>
+              <a:rPr lang="en-GB" sz="1600" dirty="0"/>
+              <a:t>This is the foundation for the pairing code recovery protocol.</a:t>
             </a:r>
           </a:p>
         </p:txBody>
@@ -7064,7 +6963,7 @@
         <p:spPr>
           <a:xfrm>
             <a:off x="0" y="0"/>
-            <a:ext cx="6858000" cy="400110"/>
+            <a:ext cx="6858000" cy="523719"/>
           </a:xfrm>
           <a:prstGeom prst="rect">
             <a:avLst/>
@@ -7079,8 +6978,8 @@
           <a:p>
             <a:pPr algn="ctr"/>
             <a:r>
-              <a:rPr lang="en-GB" sz="2000" dirty="0"/>
-              <a:t>Correction Operations - No Classical Channel Needed</a:t>
+              <a:rPr lang="en-GB" sz="3556" dirty="0"/>
+              <a:t>The Virtual Bell Measurement</a:t>
             </a:r>
           </a:p>
         </p:txBody>
@@ -7094,7 +6993,7 @@
         <p:spPr>
           <a:xfrm>
             <a:off x="150187" y="671901"/>
-            <a:ext cx="6563531" cy="8376652"/>
+            <a:ext cx="6563531" cy="8209940"/>
           </a:xfrm>
           <a:prstGeom prst="rect">
             <a:avLst/>
@@ -7110,7 +7009,7 @@
             <a:pPr algn="l"/>
             <a:r>
               <a:rPr lang="en-GB" sz="1600" dirty="0"/>
-              <a:t>In standard quantum teleportation, after the Bell measurement, the sender broadcasts the result (one of four outcomes) classically. The receiver applies the corresponding correction operation to recover the target state. The classical channel is mandatory.</a:t>
+              <a:t>In the delayed-choice experiment, Victor performs a real Bell measurement on real photons. The retroactivity comes from the timing. The physical intermediary exists.</a:t>
             </a:r>
           </a:p>
           <a:p>
@@ -7121,7 +7020,7 @@
             <a:pPr algn="l"/>
             <a:r>
               <a:rPr lang="en-GB" sz="1600" dirty="0"/>
-              <a:t>In the pairing code protocol, no classical channel exists. The correction operation cannot be communicated. This appears to be a fatal problem - but it is not.</a:t>
+              <a:t>The pairing code protocol asks whether the physical intermediary is strictly necessary, or whether two devices performing the correct local operations - independently, with no connection - can produce the same result.</a:t>
             </a:r>
           </a:p>
           <a:p>
@@ -7136,42 +7035,14 @@
             </a:pPr>
             <a:r>
               <a:rPr lang="en-GB" sz="1700" b="1" dirty="0"/>
-              <a:t>The solution - pre-computed corrections:</a:t>
-            </a:r>
-          </a:p>
-          <a:p>
-            <a:pPr lvl="1" algn="l"/>
-            <a:r>
-              <a:rPr lang="en-GB" sz="1600" dirty="0"/>
-              <a:t>A Bell measurement has exactly four possible outcomes.</a:t>
-            </a:r>
-          </a:p>
-          <a:p>
-            <a:pPr lvl="1" algn="l"/>
-            <a:r>
-              <a:rPr lang="en-GB" sz="1600" dirty="0"/>
-              <a:t>Each outcome requires a specific correction operation: I, X, Z, or XZ (the four Pauli operations).</a:t>
-            </a:r>
-          </a:p>
-          <a:p>
-            <a:pPr lvl="1" algn="l"/>
-            <a:r>
-              <a:rPr lang="en-GB" sz="1600" dirty="0"/>
-              <a:t>The pairing code pre-specifies all four correction operations for this specific device pair.</a:t>
-            </a:r>
-          </a:p>
-          <a:p>
-            <a:pPr lvl="1" algn="l"/>
-            <a:r>
-              <a:rPr lang="en-GB" sz="1600" dirty="0"/>
-              <a:t>Both devices apply all four corrections simultaneously in superposition - a procedure that is mathematically equivalent to applying the correct correction without knowing which it is.</a:t>
-            </a:r>
-          </a:p>
-          <a:p>
-            <a:pPr lvl="1" algn="l"/>
-            <a:r>
-              <a:rPr lang="en-GB" sz="1600" dirty="0"/>
-              <a:t>This only produces a consistent result if the two devices are operating on a joint quantum state - which is exactly what the retroactive entanglement would have established.</a:t>
+              <a:t>What a Bell measurement does mathematically:</a:t>
+            </a:r>
+          </a:p>
+          <a:p>
+            <a:pPr algn="l"/>
+            <a:r>
+              <a:rPr lang="en-GB" sz="1600" dirty="0"/>
+              <a:t>It projects a joint system into one of four Bell states. It transforms the joint Hilbert space. Each of the four outcomes corresponds to a specific correction operation that one party must apply to recover a target entangled state.</a:t>
             </a:r>
           </a:p>
           <a:p>
@@ -7186,14 +7057,35 @@
             </a:pPr>
             <a:r>
               <a:rPr lang="en-GB" sz="1700" b="1" dirty="0"/>
-              <a:t>The self-consistency:</a:t>
-            </a:r>
-          </a:p>
-          <a:p>
-            <a:pPr algn="l"/>
-            <a:r>
-              <a:rPr lang="en-GB" sz="1600" dirty="0"/>
-              <a:t>The correction operations only work if the systems are already in a joint state. The joint state only exists if the corrections are applied. This is a circular dependency - but in the context of retroactive causality it is a self-consistent loop, not a paradox. The delayed-choice experiment demonstrates that exactly this kind of loop can have a physical solution.</a:t>
+              <a:t>The virtual Bell measurement:</a:t>
+            </a:r>
+          </a:p>
+          <a:p>
+            <a:pPr lvl="1" algn="l"/>
+            <a:r>
+              <a:rPr lang="en-GB" sz="1600" dirty="0"/>
+              <a:t>Device A prepares its fresh Ca⁺ ions to state α - specified exactly by the pairing code.</a:t>
+            </a:r>
+          </a:p>
+          <a:p>
+            <a:pPr lvl="1" algn="l"/>
+            <a:r>
+              <a:rPr lang="en-GB" sz="1600" dirty="0"/>
+              <a:t>Device B prepares its fresh Ca⁺ ions to state β - specified exactly by the pairing code.</a:t>
+            </a:r>
+          </a:p>
+          <a:p>
+            <a:pPr lvl="1" algn="l"/>
+            <a:r>
+              <a:rPr lang="en-GB" sz="1600" dirty="0"/>
+              <a:t>Both devices independently perform the local unitary operations that constitute their half of a Bell measurement on a virtual joint system - as if a physical intermediary existed between them.</a:t>
+            </a:r>
+          </a:p>
+          <a:p>
+            <a:pPr lvl="1" algn="l"/>
+            <a:r>
+              <a:rPr lang="en-GB" sz="1600" dirty="0"/>
+              <a:t>No intermediary exists. No photons are exchanged. No classical message is sent. Each device only acts on its own ions.</a:t>
             </a:r>
           </a:p>
           <a:p>
@@ -7201,10 +7093,21 @@
             <a:endParaRPr lang="en-GB" sz="1600" dirty="0"/>
           </a:p>
           <a:p>
-            <a:pPr algn="l"/>
-            <a:r>
-              <a:rPr lang="en-GB" sz="1600" dirty="0"/>
-              <a:t>The pairing code is designed to be the unique self-consistent solution for this specific device pair. No other device pair shares the same code, so no other pair can accidentally satisfy the same self-consistency condition.</a:t>
+            <a:pPr algn="l">
+              <a:spcBef>
+                <a:spcPts val="500"/>
+              </a:spcBef>
+            </a:pPr>
+            <a:r>
+              <a:rPr lang="en-GB" sz="1700" b="1" dirty="0"/>
+              <a:t>The open question:</a:t>
+            </a:r>
+          </a:p>
+          <a:p>
+            <a:pPr algn="l"/>
+            <a:r>
+              <a:rPr lang="en-GB" sz="1600" dirty="0"/>
+              <a:t>Is the physical existence of the intermediary mandatory, or is the mathematical equivalence of the operations sufficient? Standard QM says mandatory. The EMT hypothesis implies there may be a deeper non-local structure in which mathematical equivalence is sufficient. Both questions are decided by the same experiment.</a:t>
             </a:r>
           </a:p>
         </p:txBody>
@@ -7243,7 +7146,7 @@
         <p:spPr>
           <a:xfrm>
             <a:off x="0" y="0"/>
-            <a:ext cx="6858000" cy="523719"/>
+            <a:ext cx="6858000" cy="400110"/>
           </a:xfrm>
           <a:prstGeom prst="rect">
             <a:avLst/>
@@ -7258,8 +7161,8 @@
           <a:p>
             <a:pPr algn="ctr"/>
             <a:r>
-              <a:rPr lang="en-GB" sz="3556" dirty="0"/>
-              <a:t>Phone-Like Operation</a:t>
+              <a:rPr lang="en-GB" sz="2000" dirty="0"/>
+              <a:t>Correction Operations - No Classical Channel Needed</a:t>
             </a:r>
           </a:p>
         </p:txBody>
@@ -7273,7 +7176,7 @@
         <p:spPr>
           <a:xfrm>
             <a:off x="150187" y="671901"/>
-            <a:ext cx="6563531" cy="7055778"/>
+            <a:ext cx="6563531" cy="8376652"/>
           </a:xfrm>
           <a:prstGeom prst="rect">
             <a:avLst/>
@@ -7289,7 +7192,18 @@
             <a:pPr algn="l"/>
             <a:r>
               <a:rPr lang="en-GB" sz="1600" dirty="0"/>
-              <a:t>If the virtual Bell measurement and retroactive re-entanglement work, the EMT architecture changes fundamentally. Entanglement no longer needs to be pre-established at manufacture between a fixed pair. Any two EMT devices can connect to any other, on demand, using the pairing code as a phone number.</a:t>
+              <a:t>In standard quantum teleportation, after the Bell measurement, the sender broadcasts the result (one of four outcomes) classically. The receiver applies the corresponding correction operation to recover the target state. The classical channel is mandatory.</a:t>
+            </a:r>
+          </a:p>
+          <a:p>
+            <a:pPr algn="l"/>
+            <a:endParaRPr lang="en-GB" sz="1600" dirty="0"/>
+          </a:p>
+          <a:p>
+            <a:pPr algn="l"/>
+            <a:r>
+              <a:rPr lang="en-GB" sz="1600" dirty="0"/>
+              <a:t>In the pairing code protocol, no classical channel exists. The correction operation cannot be communicated. This appears to be a fatal problem - but it is not.</a:t>
             </a:r>
           </a:p>
           <a:p>
@@ -7304,41 +7218,47 @@
             </a:pPr>
             <a:r>
               <a:rPr lang="en-GB" sz="1700" b="1" dirty="0"/>
-              <a:t>Current architecture - fixed pairs:</a:t>
-            </a:r>
-          </a:p>
-          <a:p>
-            <a:pPr algn="l"/>
-            <a:r>
-              <a:rPr lang="en-GB" sz="1300" dirty="0">
-                <a:latin typeface="Courier New"/>
-              </a:rPr>
-              <a:t>  Device A ↔ Device B   (fixed at manufacture)</a:t>
-            </a:r>
-          </a:p>
-          <a:p>
-            <a:pPr algn="l"/>
-            <a:r>
-              <a:rPr lang="en-GB" sz="1300" dirty="0">
-                <a:latin typeface="Courier New"/>
-              </a:rPr>
-              <a:t>  Device A ↔ Device C   (impossible without call centre)</a:t>
-            </a:r>
-          </a:p>
-          <a:p>
-            <a:pPr algn="l"/>
-            <a:r>
-              <a:rPr lang="en-GB" sz="1300" dirty="0">
-                <a:latin typeface="Courier New"/>
-              </a:rPr>
-              <a:t>  Device B ↔ Device C   (impossible without call centre)</a:t>
-            </a:r>
-          </a:p>
-          <a:p>
-            <a:pPr algn="l"/>
-            <a:endParaRPr lang="en-GB" sz="1300" dirty="0">
-              <a:latin typeface="Courier New"/>
-            </a:endParaRPr>
+              <a:t>The solution - pre-computed corrections:</a:t>
+            </a:r>
+          </a:p>
+          <a:p>
+            <a:pPr lvl="1" algn="l"/>
+            <a:r>
+              <a:rPr lang="en-GB" sz="1600" dirty="0"/>
+              <a:t>A Bell measurement has exactly four possible outcomes.</a:t>
+            </a:r>
+          </a:p>
+          <a:p>
+            <a:pPr lvl="1" algn="l"/>
+            <a:r>
+              <a:rPr lang="en-GB" sz="1600" dirty="0"/>
+              <a:t>Each outcome requires a specific correction operation: I, X, Z, or XZ (the four Pauli operations).</a:t>
+            </a:r>
+          </a:p>
+          <a:p>
+            <a:pPr lvl="1" algn="l"/>
+            <a:r>
+              <a:rPr lang="en-GB" sz="1600" dirty="0"/>
+              <a:t>The pairing code pre-specifies all four correction operations for this specific device pair.</a:t>
+            </a:r>
+          </a:p>
+          <a:p>
+            <a:pPr lvl="1" algn="l"/>
+            <a:r>
+              <a:rPr lang="en-GB" sz="1600" dirty="0"/>
+              <a:t>Both devices apply all four corrections simultaneously in superposition - a procedure that is mathematically equivalent to applying the correct correction without knowing which it is.</a:t>
+            </a:r>
+          </a:p>
+          <a:p>
+            <a:pPr lvl="1" algn="l"/>
+            <a:r>
+              <a:rPr lang="en-GB" sz="1600" dirty="0"/>
+              <a:t>This only produces a consistent result if the two devices are operating on a joint quantum state - which is exactly what the retroactive entanglement would have established.</a:t>
+            </a:r>
+          </a:p>
+          <a:p>
+            <a:pPr algn="l"/>
+            <a:endParaRPr lang="en-GB" sz="1600" dirty="0"/>
           </a:p>
           <a:p>
             <a:pPr algn="l">
@@ -7348,88 +7268,25 @@
             </a:pPr>
             <a:r>
               <a:rPr lang="en-GB" sz="1700" b="1" dirty="0"/>
-              <a:t>Pairing code architecture - peer to peer:</a:t>
-            </a:r>
-          </a:p>
-          <a:p>
-            <a:pPr algn="l"/>
-            <a:r>
-              <a:rPr lang="en-GB" sz="1300" dirty="0">
-                <a:latin typeface="Courier New"/>
-              </a:rPr>
-              <a:t>  Device A knows B's pairing code → can call B directly</a:t>
-            </a:r>
-          </a:p>
-          <a:p>
-            <a:pPr algn="l"/>
-            <a:r>
-              <a:rPr lang="en-GB" sz="1300" dirty="0">
-                <a:latin typeface="Courier New"/>
-              </a:rPr>
-              <a:t>  Device A knows C's pairing code → can call C directly</a:t>
-            </a:r>
-          </a:p>
-          <a:p>
-            <a:pPr algn="l"/>
-            <a:r>
-              <a:rPr lang="en-GB" sz="1300" dirty="0">
-                <a:latin typeface="Courier New"/>
-              </a:rPr>
-              <a:t>  Device B knows C's pairing code → can call C directly</a:t>
-            </a:r>
-          </a:p>
-          <a:p>
-            <a:pPr algn="l"/>
-            <a:r>
-              <a:rPr lang="en-GB" sz="1300" dirty="0">
-                <a:latin typeface="Courier New"/>
-              </a:rPr>
-              <a:t>  No call centre. No hub. No classical infrastructure.</a:t>
-            </a:r>
-          </a:p>
-          <a:p>
-            <a:pPr algn="l"/>
-            <a:endParaRPr lang="en-GB" sz="1300" dirty="0">
-              <a:latin typeface="Courier New"/>
-            </a:endParaRPr>
-          </a:p>
-          <a:p>
-            <a:pPr algn="l">
-              <a:spcBef>
-                <a:spcPts val="500"/>
-              </a:spcBef>
-            </a:pPr>
-            <a:r>
-              <a:rPr lang="en-GB" sz="1700" b="1" dirty="0"/>
-              <a:t>What the pairing code is:</a:t>
-            </a:r>
-          </a:p>
-          <a:p>
-            <a:pPr lvl="1" algn="l"/>
-            <a:r>
-              <a:rPr lang="en-GB" sz="1600" dirty="0"/>
-              <a:t>A complete quantum state specification - the exact trap parameters, secular frequencies, initial spin state, and correction operations needed to perform the virtual Bell measurement for that specific device.</a:t>
-            </a:r>
-          </a:p>
-          <a:p>
-            <a:pPr lvl="1" algn="l"/>
-            <a:r>
-              <a:rPr lang="en-GB" sz="1600" dirty="0"/>
-              <a:t>Unique to each device pair - generated from the physical characteristics of the trap chip at manufacture.</a:t>
-            </a:r>
-          </a:p>
-          <a:p>
-            <a:pPr lvl="1" algn="l"/>
-            <a:r>
-              <a:rPr lang="en-GB" sz="1600" dirty="0"/>
-              <a:t>Shareable like a phone number - give it to anyone you want to be reachable by.</a:t>
-            </a:r>
-          </a:p>
-          <a:p>
-            <a:pPr lvl="1" algn="l"/>
-            <a:r>
-              <a:rPr lang="en-GB" sz="1600" dirty="0"/>
-              <a:t>Not a secret - knowing the code lets you call the device. It does not let you impersonate it, because the physical hardware of the caller is part of the protocol.</a:t>
+              <a:t>The self-consistency:</a:t>
+            </a:r>
+          </a:p>
+          <a:p>
+            <a:pPr algn="l"/>
+            <a:r>
+              <a:rPr lang="en-GB" sz="1600" dirty="0"/>
+              <a:t>The correction operations only work if the systems are already in a joint state. The joint state only exists if the corrections are applied. This is a circular dependency - but in the context of retroactive causality it is a self-consistent loop, not a paradox. The delayed-choice experiment demonstrates that exactly this kind of loop can have a physical solution.</a:t>
+            </a:r>
+          </a:p>
+          <a:p>
+            <a:pPr algn="l"/>
+            <a:endParaRPr lang="en-GB" sz="1600" dirty="0"/>
+          </a:p>
+          <a:p>
+            <a:pPr algn="l"/>
+            <a:r>
+              <a:rPr lang="en-GB" sz="1600" dirty="0"/>
+              <a:t>The pairing code is designed to be the unique self-consistent solution for this specific device pair. No other device pair shares the same code, so no other pair can accidentally satisfy the same self-consistency condition.</a:t>
             </a:r>
           </a:p>
         </p:txBody>
@@ -7468,7 +7325,7 @@
         <p:spPr>
           <a:xfrm>
             <a:off x="0" y="0"/>
-            <a:ext cx="6858000" cy="461665"/>
+            <a:ext cx="6858000" cy="523719"/>
           </a:xfrm>
           <a:prstGeom prst="rect">
             <a:avLst/>
@@ -7483,8 +7340,8 @@
           <a:p>
             <a:pPr algn="ctr"/>
             <a:r>
-              <a:rPr lang="en-GB" sz="2400" dirty="0"/>
-              <a:t>The Ring Protocol - How a Call is Made</a:t>
+              <a:rPr lang="en-GB" sz="3556" dirty="0"/>
+              <a:t>Phone-Like Operation</a:t>
             </a:r>
           </a:p>
         </p:txBody>
@@ -7498,7 +7355,7 @@
         <p:spPr>
           <a:xfrm>
             <a:off x="150187" y="671901"/>
-            <a:ext cx="6563531" cy="9096939"/>
+            <a:ext cx="6563531" cy="7055778"/>
           </a:xfrm>
           <a:prstGeom prst="rect">
             <a:avLst/>
@@ -7514,7 +7371,7 @@
             <a:pPr algn="l"/>
             <a:r>
               <a:rPr lang="en-GB" sz="1600" dirty="0"/>
-              <a:t>To initiate a call, the caller performs the virtual Bell protocol using the target device's pairing code - tuning to the target's quantum state specification, not broadcasting their own. The called device detects activity on its own ions and knows a call is incoming, but does not yet know who is calling.</a:t>
+              <a:t>If the virtual Bell measurement and retroactive re-entanglement work, the EMT architecture changes fundamentally. Entanglement no longer needs to be pre-established at manufacture between a fixed pair. Any two EMT devices can connect to any other, on demand, using the pairing code as a phone number.</a:t>
             </a:r>
           </a:p>
           <a:p>
@@ -7529,47 +7386,41 @@
             </a:pPr>
             <a:r>
               <a:rPr lang="en-GB" sz="1700" b="1" dirty="0"/>
-              <a:t>Step 1 - Ring:</a:t>
-            </a:r>
-          </a:p>
-          <a:p>
-            <a:pPr lvl="1" algn="l"/>
-            <a:r>
-              <a:rPr lang="en-GB" sz="1600" dirty="0"/>
-              <a:t>Caller prepares its ions using the destination's pairing code.</a:t>
-            </a:r>
-          </a:p>
-          <a:p>
-            <a:pPr lvl="1" algn="l"/>
-            <a:r>
-              <a:rPr lang="en-GB" sz="1600" dirty="0"/>
-              <a:t>Caller performs its half of the virtual Bell measurement for the target device.</a:t>
-            </a:r>
-          </a:p>
-          <a:p>
-            <a:pPr lvl="1" algn="l"/>
-            <a:r>
-              <a:rPr lang="en-GB" sz="1600" dirty="0"/>
-              <a:t>Target's ions respond - target detects an incoming call attempt.</a:t>
-            </a:r>
-          </a:p>
-          <a:p>
-            <a:pPr lvl="1" algn="l"/>
-            <a:r>
-              <a:rPr lang="en-GB" sz="1600" dirty="0"/>
-              <a:t>Target knows: someone is calling. Target does not know: who.</a:t>
-            </a:r>
-          </a:p>
-          <a:p>
-            <a:pPr lvl="1" algn="l"/>
-            <a:r>
-              <a:rPr lang="en-GB" sz="1600" dirty="0"/>
-              <a:t>Ring repeats on a fixed schedule until answered or caller gives up.</a:t>
-            </a:r>
-          </a:p>
-          <a:p>
-            <a:pPr algn="l"/>
-            <a:endParaRPr lang="en-GB" sz="1600" dirty="0"/>
+              <a:t>Current architecture - fixed pairs:</a:t>
+            </a:r>
+          </a:p>
+          <a:p>
+            <a:pPr algn="l"/>
+            <a:r>
+              <a:rPr lang="en-GB" sz="1300" dirty="0">
+                <a:latin typeface="Courier New"/>
+              </a:rPr>
+              <a:t>  Device A ↔ Device B   (fixed at manufacture)</a:t>
+            </a:r>
+          </a:p>
+          <a:p>
+            <a:pPr algn="l"/>
+            <a:r>
+              <a:rPr lang="en-GB" sz="1300" dirty="0">
+                <a:latin typeface="Courier New"/>
+              </a:rPr>
+              <a:t>  Device A ↔ Device C   (impossible without call centre)</a:t>
+            </a:r>
+          </a:p>
+          <a:p>
+            <a:pPr algn="l"/>
+            <a:r>
+              <a:rPr lang="en-GB" sz="1300" dirty="0">
+                <a:latin typeface="Courier New"/>
+              </a:rPr>
+              <a:t>  Device B ↔ Device C   (impossible without call centre)</a:t>
+            </a:r>
+          </a:p>
+          <a:p>
+            <a:pPr algn="l"/>
+            <a:endParaRPr lang="en-GB" sz="1300" dirty="0">
+              <a:latin typeface="Courier New"/>
+            </a:endParaRPr>
           </a:p>
           <a:p>
             <a:pPr algn="l">
@@ -7579,19 +7430,50 @@
             </a:pPr>
             <a:r>
               <a:rPr lang="en-GB" sz="1700" b="1" dirty="0"/>
-              <a:t>Step 2 - Answer:</a:t>
-            </a:r>
-          </a:p>
-          <a:p>
-            <a:pPr lvl="1" algn="l"/>
-            <a:r>
-              <a:rPr lang="en-GB" sz="1600" dirty="0"/>
-              <a:t>User accepts the call. Target performs no separate outgoing connection - the entanglement is bidirectional by nature. Answering simply completes the virtual Bell protocol already initiated by the caller.</a:t>
-            </a:r>
-          </a:p>
-          <a:p>
-            <a:pPr algn="l"/>
-            <a:endParaRPr lang="en-GB" sz="1600" dirty="0"/>
+              <a:t>Pairing code architecture - peer to peer:</a:t>
+            </a:r>
+          </a:p>
+          <a:p>
+            <a:pPr algn="l"/>
+            <a:r>
+              <a:rPr lang="en-GB" sz="1300" dirty="0">
+                <a:latin typeface="Courier New"/>
+              </a:rPr>
+              <a:t>  Device A knows B's pairing code → can call B directly</a:t>
+            </a:r>
+          </a:p>
+          <a:p>
+            <a:pPr algn="l"/>
+            <a:r>
+              <a:rPr lang="en-GB" sz="1300" dirty="0">
+                <a:latin typeface="Courier New"/>
+              </a:rPr>
+              <a:t>  Device A knows C's pairing code → can call C directly</a:t>
+            </a:r>
+          </a:p>
+          <a:p>
+            <a:pPr algn="l"/>
+            <a:r>
+              <a:rPr lang="en-GB" sz="1300" dirty="0">
+                <a:latin typeface="Courier New"/>
+              </a:rPr>
+              <a:t>  Device B knows C's pairing code → can call C directly</a:t>
+            </a:r>
+          </a:p>
+          <a:p>
+            <a:pPr algn="l"/>
+            <a:r>
+              <a:rPr lang="en-GB" sz="1300" dirty="0">
+                <a:latin typeface="Courier New"/>
+              </a:rPr>
+              <a:t>  No call centre. No hub. No classical infrastructure.</a:t>
+            </a:r>
+          </a:p>
+          <a:p>
+            <a:pPr algn="l"/>
+            <a:endParaRPr lang="en-GB" sz="1300" dirty="0">
+              <a:latin typeface="Courier New"/>
+            </a:endParaRPr>
           </a:p>
           <a:p>
             <a:pPr algn="l">
@@ -7601,57 +7483,35 @@
             </a:pPr>
             <a:r>
               <a:rPr lang="en-GB" sz="1700" b="1" dirty="0"/>
-              <a:t>Step 3 - Connect:</a:t>
-            </a:r>
-          </a:p>
-          <a:p>
-            <a:pPr lvl="1" algn="l"/>
-            <a:r>
-              <a:rPr lang="en-GB" sz="1600" dirty="0"/>
-              <a:t>Virtual Bell measurement completes. The entire ion grid re-entangles on both devices simultaneously.</a:t>
-            </a:r>
-          </a:p>
-          <a:p>
-            <a:pPr lvl="1" algn="l"/>
-            <a:r>
-              <a:rPr lang="en-GB" sz="1600" dirty="0"/>
-              <a:t>Entanglement is inherently bidirectional - no TX/RX distinction exists at the entanglement level. Full-duplex is available from the first moment of connection.</a:t>
-            </a:r>
-          </a:p>
-          <a:p>
-            <a:pPr lvl="1" algn="l"/>
-            <a:r>
-              <a:rPr lang="en-GB" sz="1600" dirty="0"/>
-              <a:t>The TX/RX row split is a software choice applied on top of the entangled channel, not a property of the entanglement itself.</a:t>
-            </a:r>
-          </a:p>
-          <a:p>
-            <a:pPr algn="l"/>
-            <a:endParaRPr lang="en-GB" sz="1600" dirty="0"/>
-          </a:p>
-          <a:p>
-            <a:pPr algn="l">
-              <a:spcBef>
-                <a:spcPts val="500"/>
-              </a:spcBef>
-            </a:pPr>
-            <a:r>
-              <a:rPr lang="en-GB" sz="1700" b="1" dirty="0"/>
-              <a:t>Step 4 - End call:</a:t>
-            </a:r>
-          </a:p>
-          <a:p>
-            <a:pPr lvl="1" algn="l"/>
-            <a:r>
-              <a:rPr lang="en-GB" sz="1600" dirty="0"/>
-              <a:t>Either party transmits the end-of-call sequence (sustained HOME orientation on all rows).</a:t>
-            </a:r>
-          </a:p>
-          <a:p>
-            <a:pPr lvl="1" algn="l"/>
-            <a:r>
-              <a:rPr lang="en-GB" sz="1600" dirty="0"/>
-              <a:t>Both devices detect the end signal, release the entanglement, and return to standby. Calcium partially consumed from reserve.</a:t>
+              <a:t>What the pairing code is:</a:t>
+            </a:r>
+          </a:p>
+          <a:p>
+            <a:pPr lvl="1" algn="l"/>
+            <a:r>
+              <a:rPr lang="en-GB" sz="1600" dirty="0"/>
+              <a:t>A complete quantum state specification - the exact trap parameters, secular frequencies, initial spin state, and correction operations needed to perform the virtual Bell measurement for that specific device.</a:t>
+            </a:r>
+          </a:p>
+          <a:p>
+            <a:pPr lvl="1" algn="l"/>
+            <a:r>
+              <a:rPr lang="en-GB" sz="1600" dirty="0"/>
+              <a:t>Unique to each device pair - generated from the physical characteristics of the trap chip at manufacture.</a:t>
+            </a:r>
+          </a:p>
+          <a:p>
+            <a:pPr lvl="1" algn="l"/>
+            <a:r>
+              <a:rPr lang="en-GB" sz="1600" dirty="0"/>
+              <a:t>Shareable like a phone number - give it to anyone you want to be reachable by.</a:t>
+            </a:r>
+          </a:p>
+          <a:p>
+            <a:pPr lvl="1" algn="l"/>
+            <a:r>
+              <a:rPr lang="en-GB" sz="1600" dirty="0"/>
+              <a:t>Not a secret - knowing the code lets you call the device. It does not let you impersonate it, because the physical hardware of the caller is part of the protocol.</a:t>
             </a:r>
           </a:p>
         </p:txBody>
@@ -7665,6 +7525,228 @@
 </file>
 
 <file path=ppt/slides/slide33.xml><?xml version="1.0" encoding="utf-8"?>
+<p:sld xmlns:a="http://schemas.openxmlformats.org/drawingml/2006/main" xmlns:r="http://schemas.openxmlformats.org/officeDocument/2006/relationships" xmlns:p="http://schemas.openxmlformats.org/presentationml/2006/main">
+  <p:cSld>
+    <p:spTree>
+      <p:nvGrpSpPr>
+        <p:cNvPr id="1" name=""/>
+        <p:cNvGrpSpPr/>
+        <p:nvPr/>
+      </p:nvGrpSpPr>
+      <p:grpSpPr>
+        <a:xfrm>
+          <a:off x="0" y="0"/>
+          <a:ext cx="0" cy="0"/>
+          <a:chOff x="0" y="0"/>
+          <a:chExt cx="0" cy="0"/>
+        </a:xfrm>
+      </p:grpSpPr>
+      <p:sp>
+        <p:nvSpPr>
+          <p:cNvPr id="2" name="TextBox 1"/>
+          <p:cNvSpPr txBox="1"/>
+          <p:nvPr/>
+        </p:nvSpPr>
+        <p:spPr>
+          <a:xfrm>
+            <a:off x="0" y="0"/>
+            <a:ext cx="6858000" cy="461665"/>
+          </a:xfrm>
+          <a:prstGeom prst="rect">
+            <a:avLst/>
+          </a:prstGeom>
+          <a:noFill/>
+        </p:spPr>
+        <p:txBody>
+          <a:bodyPr wrap="square">
+            <a:spAutoFit/>
+          </a:bodyPr>
+          <a:lstStyle/>
+          <a:p>
+            <a:pPr algn="ctr"/>
+            <a:r>
+              <a:rPr lang="en-GB" sz="2400" dirty="0"/>
+              <a:t>The Ring Protocol - How a Call is Made</a:t>
+            </a:r>
+          </a:p>
+        </p:txBody>
+      </p:sp>
+      <p:sp>
+        <p:nvSpPr>
+          <p:cNvPr id="3" name="TextBox 2"/>
+          <p:cNvSpPr txBox="1"/>
+          <p:nvPr/>
+        </p:nvSpPr>
+        <p:spPr>
+          <a:xfrm>
+            <a:off x="150187" y="671901"/>
+            <a:ext cx="6563531" cy="9096939"/>
+          </a:xfrm>
+          <a:prstGeom prst="rect">
+            <a:avLst/>
+          </a:prstGeom>
+          <a:noFill/>
+        </p:spPr>
+        <p:txBody>
+          <a:bodyPr wrap="square">
+            <a:spAutoFit/>
+          </a:bodyPr>
+          <a:lstStyle/>
+          <a:p>
+            <a:pPr algn="l"/>
+            <a:r>
+              <a:rPr lang="en-GB" sz="1600" dirty="0"/>
+              <a:t>To initiate a call, the caller performs the virtual Bell protocol using the target device's pairing code - tuning to the target's quantum state specification, not broadcasting their own. The called device detects activity on its own ions and knows a call is incoming, but does not yet know who is calling.</a:t>
+            </a:r>
+          </a:p>
+          <a:p>
+            <a:pPr algn="l"/>
+            <a:endParaRPr lang="en-GB" sz="1600" dirty="0"/>
+          </a:p>
+          <a:p>
+            <a:pPr algn="l">
+              <a:spcBef>
+                <a:spcPts val="500"/>
+              </a:spcBef>
+            </a:pPr>
+            <a:r>
+              <a:rPr lang="en-GB" sz="1700" b="1" dirty="0"/>
+              <a:t>Step 1 - Ring:</a:t>
+            </a:r>
+          </a:p>
+          <a:p>
+            <a:pPr lvl="1" algn="l"/>
+            <a:r>
+              <a:rPr lang="en-GB" sz="1600" dirty="0"/>
+              <a:t>Caller prepares its ions using the destination's pairing code.</a:t>
+            </a:r>
+          </a:p>
+          <a:p>
+            <a:pPr lvl="1" algn="l"/>
+            <a:r>
+              <a:rPr lang="en-GB" sz="1600" dirty="0"/>
+              <a:t>Caller performs its half of the virtual Bell measurement for the target device.</a:t>
+            </a:r>
+          </a:p>
+          <a:p>
+            <a:pPr lvl="1" algn="l"/>
+            <a:r>
+              <a:rPr lang="en-GB" sz="1600" dirty="0"/>
+              <a:t>Target's ions respond - target detects an incoming call attempt.</a:t>
+            </a:r>
+          </a:p>
+          <a:p>
+            <a:pPr lvl="1" algn="l"/>
+            <a:r>
+              <a:rPr lang="en-GB" sz="1600" dirty="0"/>
+              <a:t>Target knows: someone is calling. Target does not know: who.</a:t>
+            </a:r>
+          </a:p>
+          <a:p>
+            <a:pPr lvl="1" algn="l"/>
+            <a:r>
+              <a:rPr lang="en-GB" sz="1600" dirty="0"/>
+              <a:t>Ring repeats on a fixed schedule until answered or caller gives up.</a:t>
+            </a:r>
+          </a:p>
+          <a:p>
+            <a:pPr algn="l"/>
+            <a:endParaRPr lang="en-GB" sz="1600" dirty="0"/>
+          </a:p>
+          <a:p>
+            <a:pPr algn="l">
+              <a:spcBef>
+                <a:spcPts val="500"/>
+              </a:spcBef>
+            </a:pPr>
+            <a:r>
+              <a:rPr lang="en-GB" sz="1700" b="1" dirty="0"/>
+              <a:t>Step 2 - Answer:</a:t>
+            </a:r>
+          </a:p>
+          <a:p>
+            <a:pPr lvl="1" algn="l"/>
+            <a:r>
+              <a:rPr lang="en-GB" sz="1600" dirty="0"/>
+              <a:t>User accepts the call. Target performs no separate outgoing connection - the entanglement is bidirectional by nature. Answering simply completes the virtual Bell protocol already initiated by the caller.</a:t>
+            </a:r>
+          </a:p>
+          <a:p>
+            <a:pPr algn="l"/>
+            <a:endParaRPr lang="en-GB" sz="1600" dirty="0"/>
+          </a:p>
+          <a:p>
+            <a:pPr algn="l">
+              <a:spcBef>
+                <a:spcPts val="500"/>
+              </a:spcBef>
+            </a:pPr>
+            <a:r>
+              <a:rPr lang="en-GB" sz="1700" b="1" dirty="0"/>
+              <a:t>Step 3 - Connect:</a:t>
+            </a:r>
+          </a:p>
+          <a:p>
+            <a:pPr lvl="1" algn="l"/>
+            <a:r>
+              <a:rPr lang="en-GB" sz="1600" dirty="0"/>
+              <a:t>Virtual Bell measurement completes. The entire ion grid re-entangles on both devices simultaneously.</a:t>
+            </a:r>
+          </a:p>
+          <a:p>
+            <a:pPr lvl="1" algn="l"/>
+            <a:r>
+              <a:rPr lang="en-GB" sz="1600" dirty="0"/>
+              <a:t>Entanglement is inherently bidirectional - no TX/RX distinction exists at the entanglement level. Full-duplex is available from the first moment of connection.</a:t>
+            </a:r>
+          </a:p>
+          <a:p>
+            <a:pPr lvl="1" algn="l"/>
+            <a:r>
+              <a:rPr lang="en-GB" sz="1600" dirty="0"/>
+              <a:t>The TX/RX row split is a software choice applied on top of the entangled channel, not a property of the entanglement itself.</a:t>
+            </a:r>
+          </a:p>
+          <a:p>
+            <a:pPr algn="l"/>
+            <a:endParaRPr lang="en-GB" sz="1600" dirty="0"/>
+          </a:p>
+          <a:p>
+            <a:pPr algn="l">
+              <a:spcBef>
+                <a:spcPts val="500"/>
+              </a:spcBef>
+            </a:pPr>
+            <a:r>
+              <a:rPr lang="en-GB" sz="1700" b="1" dirty="0"/>
+              <a:t>Step 4 - End call:</a:t>
+            </a:r>
+          </a:p>
+          <a:p>
+            <a:pPr lvl="1" algn="l"/>
+            <a:r>
+              <a:rPr lang="en-GB" sz="1600" dirty="0"/>
+              <a:t>Either party transmits the end-of-call sequence (sustained HOME orientation on all rows).</a:t>
+            </a:r>
+          </a:p>
+          <a:p>
+            <a:pPr lvl="1" algn="l"/>
+            <a:r>
+              <a:rPr lang="en-GB" sz="1600" dirty="0"/>
+              <a:t>Both devices detect the end signal, release the entanglement, and return to standby. Calcium partially consumed from reserve.</a:t>
+            </a:r>
+          </a:p>
+        </p:txBody>
+      </p:sp>
+    </p:spTree>
+  </p:cSld>
+  <p:clrMapOvr>
+    <a:masterClrMapping/>
+  </p:clrMapOvr>
+</p:sld>
+</file>
+
+<file path=ppt/slides/slide34.xml><?xml version="1.0" encoding="utf-8"?>
 <p:sld xmlns:a="http://schemas.openxmlformats.org/drawingml/2006/main" xmlns:r="http://schemas.openxmlformats.org/officeDocument/2006/relationships" xmlns:p="http://schemas.openxmlformats.org/presentationml/2006/main">
   <p:cSld>
     <p:spTree>
@@ -8720,7 +8802,7 @@
       </p:sp>
       <p:pic>
         <p:nvPicPr>
-          <p:cNvPr id="4" name="Picture 3" descr="read_methods.png"/>
+          <p:cNvPr id="4" name="Picture 3" descr="read_gs.png"/>
           <p:cNvPicPr>
             <a:picLocks noChangeAspect="1"/>
           </p:cNvPicPr>
@@ -8734,7 +8816,7 @@
         </p:blipFill>
         <p:spPr>
           <a:xfrm>
-            <a:off x="0" y="3713031"/>
+            <a:off x="0" y="3713378"/>
             <a:ext cx="6784848" cy="5440680"/>
           </a:xfrm>
           <a:prstGeom prst="rect">

--- a/revisions/QuantumEntangledMultiplexingTransceiver_Rev5.pptx
+++ b/revisions/QuantumEntangledMultiplexingTransceiver_Rev5.pptx
@@ -3176,9 +3176,10 @@
           <a:p>
             <a:pPr algn="ctr"/>
             <a:r>
-              <a:rPr lang="en-GB" dirty="0"/>
-              <a:t>Rev.1</a:t>
-            </a:r>
+              <a:rPr lang="en-GB"/>
+              <a:t>Rev.5</a:t>
+            </a:r>
+            <a:endParaRPr lang="en-GB" dirty="0"/>
           </a:p>
         </p:txBody>
       </p:sp>
